--- a/slides/Lecture3.pptx
+++ b/slides/Lecture3.pptx
@@ -5,13 +5,25 @@
     <p:sldMasterId id="2147483648" r:id="rId1"/>
   </p:sldMasterIdLst>
   <p:notesMasterIdLst>
-    <p:notesMasterId r:id="rId6"/>
+    <p:notesMasterId r:id="rId18"/>
   </p:notesMasterIdLst>
   <p:sldIdLst>
     <p:sldId id="256" r:id="rId2"/>
-    <p:sldId id="289" r:id="rId3"/>
-    <p:sldId id="290" r:id="rId4"/>
-    <p:sldId id="291" r:id="rId5"/>
+    <p:sldId id="293" r:id="rId3"/>
+    <p:sldId id="301" r:id="rId4"/>
+    <p:sldId id="294" r:id="rId5"/>
+    <p:sldId id="295" r:id="rId6"/>
+    <p:sldId id="296" r:id="rId7"/>
+    <p:sldId id="297" r:id="rId8"/>
+    <p:sldId id="298" r:id="rId9"/>
+    <p:sldId id="299" r:id="rId10"/>
+    <p:sldId id="300" r:id="rId11"/>
+    <p:sldId id="302" r:id="rId12"/>
+    <p:sldId id="303" r:id="rId13"/>
+    <p:sldId id="289" r:id="rId14"/>
+    <p:sldId id="290" r:id="rId15"/>
+    <p:sldId id="291" r:id="rId16"/>
+    <p:sldId id="292" r:id="rId17"/>
   </p:sldIdLst>
   <p:sldSz cx="12192000" cy="6858000"/>
   <p:notesSz cx="6858000" cy="9144000"/>
@@ -200,7 +212,7 @@
           <a:p>
             <a:fld id="{E87D854A-D757-5C4C-A465-3201C554EB8D}" type="datetimeFigureOut">
               <a:rPr lang="en-US" smtClean="0"/>
-              <a:t>8/16/25</a:t>
+              <a:t>8/20/25</a:t>
             </a:fld>
             <a:endParaRPr lang="en-US"/>
           </a:p>
@@ -613,7 +625,7 @@
           <a:p>
             <a:fld id="{F1276487-8B75-2F43-9355-4B467BD57A6C}" type="datetime1">
               <a:rPr lang="en-US" smtClean="0"/>
-              <a:t>8/16/25</a:t>
+              <a:t>8/20/25</a:t>
             </a:fld>
             <a:endParaRPr lang="en-US"/>
           </a:p>
@@ -819,7 +831,7 @@
           <a:p>
             <a:fld id="{30B10427-957C-524C-8454-F629CBA9C9BE}" type="datetime1">
               <a:rPr lang="en-US" smtClean="0"/>
-              <a:t>8/16/25</a:t>
+              <a:t>8/20/25</a:t>
             </a:fld>
             <a:endParaRPr lang="en-US"/>
           </a:p>
@@ -1035,7 +1047,7 @@
           <a:p>
             <a:fld id="{4B97C5AB-4FB5-3149-A6CF-D0F885A81EBA}" type="datetime1">
               <a:rPr lang="en-US" smtClean="0"/>
-              <a:t>8/16/25</a:t>
+              <a:t>8/20/25</a:t>
             </a:fld>
             <a:endParaRPr lang="en-US"/>
           </a:p>
@@ -1241,7 +1253,7 @@
           <a:p>
             <a:fld id="{8D8F5D7A-DAAE-D246-A661-ED1AD3964955}" type="datetime1">
               <a:rPr lang="en-US" smtClean="0"/>
-              <a:t>8/16/25</a:t>
+              <a:t>8/20/25</a:t>
             </a:fld>
             <a:endParaRPr lang="en-US"/>
           </a:p>
@@ -1524,7 +1536,7 @@
           <a:p>
             <a:fld id="{801806B9-6C4B-3B45-9110-CA58C108BE01}" type="datetime1">
               <a:rPr lang="en-US" smtClean="0"/>
-              <a:t>8/16/25</a:t>
+              <a:t>8/20/25</a:t>
             </a:fld>
             <a:endParaRPr lang="en-US"/>
           </a:p>
@@ -1797,7 +1809,7 @@
           <a:p>
             <a:fld id="{025C6FEA-FDE7-B240-BEAF-6A3F6212E36E}" type="datetime1">
               <a:rPr lang="en-US" smtClean="0"/>
-              <a:t>8/16/25</a:t>
+              <a:t>8/20/25</a:t>
             </a:fld>
             <a:endParaRPr lang="en-US"/>
           </a:p>
@@ -2217,7 +2229,7 @@
           <a:p>
             <a:fld id="{895F5DD0-F679-3747-91F3-9DC9C3F86CB6}" type="datetime1">
               <a:rPr lang="en-US" smtClean="0"/>
-              <a:t>8/16/25</a:t>
+              <a:t>8/20/25</a:t>
             </a:fld>
             <a:endParaRPr lang="en-US"/>
           </a:p>
@@ -2366,7 +2378,7 @@
           <a:p>
             <a:fld id="{9EDA3FF8-7A34-ED49-AA5D-BC76DF58E74E}" type="datetime1">
               <a:rPr lang="en-US" smtClean="0"/>
-              <a:t>8/16/25</a:t>
+              <a:t>8/20/25</a:t>
             </a:fld>
             <a:endParaRPr lang="en-US"/>
           </a:p>
@@ -2487,7 +2499,7 @@
           <a:p>
             <a:fld id="{182A1C80-5B2D-564F-B8C6-B0B5B92F5809}" type="datetime1">
               <a:rPr lang="en-US" smtClean="0"/>
-              <a:t>8/16/25</a:t>
+              <a:t>8/20/25</a:t>
             </a:fld>
             <a:endParaRPr lang="en-US"/>
           </a:p>
@@ -2806,7 +2818,7 @@
           <a:p>
             <a:fld id="{65F75D97-7D6D-EC47-8250-30DF936063AD}" type="datetime1">
               <a:rPr lang="en-US" smtClean="0"/>
-              <a:t>8/16/25</a:t>
+              <a:t>8/20/25</a:t>
             </a:fld>
             <a:endParaRPr lang="en-US"/>
           </a:p>
@@ -3102,7 +3114,7 @@
           <a:p>
             <a:fld id="{D2E89D4A-5528-5F41-9AF6-6B3105C8A7C3}" type="datetime1">
               <a:rPr lang="en-US" smtClean="0"/>
-              <a:t>8/16/25</a:t>
+              <a:t>8/20/25</a:t>
             </a:fld>
             <a:endParaRPr lang="en-US"/>
           </a:p>
@@ -3343,7 +3355,7 @@
           <a:p>
             <a:fld id="{86344417-86B7-E841-9AA9-C4BE48872EF5}" type="datetime1">
               <a:rPr lang="en-US" smtClean="0"/>
-              <a:t>8/16/25</a:t>
+              <a:t>8/20/25</a:t>
             </a:fld>
             <a:endParaRPr lang="en-US"/>
           </a:p>
@@ -3987,7 +3999,7 @@
 </p:sld>
 </file>
 
-<file path=ppt/slides/slide2.xml><?xml version="1.0" encoding="utf-8"?>
+<file path=ppt/slides/slide10.xml><?xml version="1.0" encoding="utf-8"?>
 <p:sld xmlns:a="http://schemas.openxmlformats.org/drawingml/2006/main" xmlns:r="http://schemas.openxmlformats.org/officeDocument/2006/relationships" xmlns:p="http://schemas.openxmlformats.org/presentationml/2006/main">
   <p:cSld>
     <p:spTree>
@@ -4006,10 +4018,112 @@
       </p:grpSpPr>
       <p:sp>
         <p:nvSpPr>
+          <p:cNvPr id="2" name="Title 1">
+            <a:extLst>
+              <a:ext uri="{FF2B5EF4-FFF2-40B4-BE49-F238E27FC236}">
+                <a16:creationId xmlns:a16="http://schemas.microsoft.com/office/drawing/2014/main" id="{4D21A3A4-A25E-3D61-80B5-B004105C9C32}"/>
+              </a:ext>
+            </a:extLst>
+          </p:cNvPr>
+          <p:cNvSpPr>
+            <a:spLocks noGrp="1"/>
+          </p:cNvSpPr>
+          <p:nvPr>
+            <p:ph type="title"/>
+          </p:nvPr>
+        </p:nvSpPr>
+        <p:spPr/>
+        <p:txBody>
+          <a:bodyPr/>
+          <a:lstStyle/>
+          <a:p>
+            <a:r>
+              <a:rPr lang="en-US" dirty="0"/>
+              <a:t>Finalized view spec based on feedback</a:t>
+            </a:r>
+          </a:p>
+        </p:txBody>
+      </p:sp>
+      <p:sp>
+        <p:nvSpPr>
+          <p:cNvPr id="3" name="Content Placeholder 2">
+            <a:extLst>
+              <a:ext uri="{FF2B5EF4-FFF2-40B4-BE49-F238E27FC236}">
+                <a16:creationId xmlns:a16="http://schemas.microsoft.com/office/drawing/2014/main" id="{9250A60C-038B-6832-3765-89BD7D6C1EE5}"/>
+              </a:ext>
+            </a:extLst>
+          </p:cNvPr>
+          <p:cNvSpPr>
+            <a:spLocks noGrp="1"/>
+          </p:cNvSpPr>
+          <p:nvPr>
+            <p:ph idx="1"/>
+          </p:nvPr>
+        </p:nvSpPr>
+        <p:spPr/>
+        <p:txBody>
+          <a:bodyPr/>
+          <a:lstStyle/>
+          <a:p>
+            <a:r>
+              <a:rPr lang="en-US" dirty="0"/>
+              <a:t>4 </a:t>
+            </a:r>
+            <a:r>
+              <a:rPr lang="en-US" dirty="0" err="1"/>
+              <a:t>divs</a:t>
+            </a:r>
+            <a:r>
+              <a:rPr lang="en-US" dirty="0"/>
+              <a:t> vertically stacked, and horizontally centered</a:t>
+            </a:r>
+          </a:p>
+          <a:p>
+            <a:pPr lvl="1"/>
+            <a:endParaRPr lang="en-US" dirty="0"/>
+          </a:p>
+          <a:p>
+            <a:r>
+              <a:rPr lang="en-US" dirty="0"/>
+              <a:t>From top to bottom, they are</a:t>
+            </a:r>
+          </a:p>
+          <a:p>
+            <a:pPr lvl="1"/>
+            <a:r>
+              <a:rPr lang="en-US" dirty="0"/>
+              <a:t>“restart” and “undo” button menu</a:t>
+            </a:r>
+          </a:p>
+          <a:p>
+            <a:pPr lvl="1"/>
+            <a:r>
+              <a:rPr lang="en-US" dirty="0"/>
+              <a:t>Board</a:t>
+            </a:r>
+          </a:p>
+          <a:p>
+            <a:pPr lvl="1"/>
+            <a:r>
+              <a:rPr lang="en-US" dirty="0"/>
+              <a:t>Game status (started or ended or in progress)</a:t>
+            </a:r>
+          </a:p>
+          <a:p>
+            <a:pPr lvl="1"/>
+            <a:r>
+              <a:rPr lang="en-US" dirty="0"/>
+              <a:t>Player status (whether one of the players has disconnected)</a:t>
+            </a:r>
+          </a:p>
+        </p:txBody>
+      </p:sp>
+      <p:sp>
+        <p:nvSpPr>
           <p:cNvPr id="4" name="Slide Number Placeholder 3">
             <a:extLst>
               <a:ext uri="{FF2B5EF4-FFF2-40B4-BE49-F238E27FC236}">
-                <a16:creationId xmlns:a16="http://schemas.microsoft.com/office/drawing/2014/main" id="{EA9A51AD-DAB4-490B-61FD-4BAD314648C2}"/>
+                <a16:creationId xmlns:a16="http://schemas.microsoft.com/office/drawing/2014/main" id="{B8045D38-42D4-B967-7E64-FE0A235D798F}"/>
               </a:ext>
             </a:extLst>
           </p:cNvPr>
@@ -4027,7 +4141,318 @@
           <a:p>
             <a:fld id="{3AB30462-0FD5-604F-8C98-DCC91BE84583}" type="slidenum">
               <a:rPr lang="en-US" smtClean="0"/>
-              <a:t>2</a:t>
+              <a:t>10</a:t>
+            </a:fld>
+            <a:endParaRPr lang="en-US"/>
+          </a:p>
+        </p:txBody>
+      </p:sp>
+    </p:spTree>
+    <p:extLst>
+      <p:ext uri="{BB962C8B-B14F-4D97-AF65-F5344CB8AC3E}">
+        <p14:creationId xmlns:p14="http://schemas.microsoft.com/office/powerpoint/2010/main" val="1427463258"/>
+      </p:ext>
+    </p:extLst>
+  </p:cSld>
+  <p:clrMapOvr>
+    <a:masterClrMapping/>
+  </p:clrMapOvr>
+</p:sld>
+</file>
+
+<file path=ppt/slides/slide11.xml><?xml version="1.0" encoding="utf-8"?>
+<p:sld xmlns:a="http://schemas.openxmlformats.org/drawingml/2006/main" xmlns:r="http://schemas.openxmlformats.org/officeDocument/2006/relationships" xmlns:p="http://schemas.openxmlformats.org/presentationml/2006/main">
+  <p:cSld>
+    <p:spTree>
+      <p:nvGrpSpPr>
+        <p:cNvPr id="1" name="">
+          <a:extLst>
+            <a:ext uri="{FF2B5EF4-FFF2-40B4-BE49-F238E27FC236}">
+              <a16:creationId xmlns:a16="http://schemas.microsoft.com/office/drawing/2014/main" id="{8B8ABD5A-96A3-8FD0-E765-7A91862BD016}"/>
+            </a:ext>
+          </a:extLst>
+        </p:cNvPr>
+        <p:cNvGrpSpPr/>
+        <p:nvPr/>
+      </p:nvGrpSpPr>
+      <p:grpSpPr>
+        <a:xfrm>
+          <a:off x="0" y="0"/>
+          <a:ext cx="0" cy="0"/>
+          <a:chOff x="0" y="0"/>
+          <a:chExt cx="0" cy="0"/>
+        </a:xfrm>
+      </p:grpSpPr>
+      <p:sp>
+        <p:nvSpPr>
+          <p:cNvPr id="2" name="Title 1">
+            <a:extLst>
+              <a:ext uri="{FF2B5EF4-FFF2-40B4-BE49-F238E27FC236}">
+                <a16:creationId xmlns:a16="http://schemas.microsoft.com/office/drawing/2014/main" id="{100BB354-8C11-EEA7-C53C-20A2C3A3DA69}"/>
+              </a:ext>
+            </a:extLst>
+          </p:cNvPr>
+          <p:cNvSpPr>
+            <a:spLocks noGrp="1"/>
+          </p:cNvSpPr>
+          <p:nvPr>
+            <p:ph type="title"/>
+          </p:nvPr>
+        </p:nvSpPr>
+        <p:spPr/>
+        <p:txBody>
+          <a:bodyPr/>
+          <a:lstStyle/>
+          <a:p>
+            <a:r>
+              <a:rPr lang="en-US" altLang="zh-CN" dirty="0"/>
+              <a:t>Gomoku</a:t>
+            </a:r>
+            <a:r>
+              <a:rPr lang="zh-CN" altLang="en-US" dirty="0"/>
+              <a:t> </a:t>
+            </a:r>
+            <a:r>
+              <a:rPr lang="en-US" altLang="zh-CN" dirty="0"/>
+              <a:t>architecture</a:t>
+            </a:r>
+            <a:r>
+              <a:rPr lang="zh-CN" altLang="en-US" dirty="0"/>
+              <a:t> </a:t>
+            </a:r>
+            <a:r>
+              <a:rPr lang="en-US" altLang="zh-CN" dirty="0"/>
+              <a:t>design</a:t>
+            </a:r>
+            <a:endParaRPr lang="en-US" dirty="0"/>
+          </a:p>
+        </p:txBody>
+      </p:sp>
+      <p:sp>
+        <p:nvSpPr>
+          <p:cNvPr id="4" name="Slide Number Placeholder 3">
+            <a:extLst>
+              <a:ext uri="{FF2B5EF4-FFF2-40B4-BE49-F238E27FC236}">
+                <a16:creationId xmlns:a16="http://schemas.microsoft.com/office/drawing/2014/main" id="{497CCB32-1C86-C5C9-9A41-4F893C8BC1E9}"/>
+              </a:ext>
+            </a:extLst>
+          </p:cNvPr>
+          <p:cNvSpPr>
+            <a:spLocks noGrp="1"/>
+          </p:cNvSpPr>
+          <p:nvPr>
+            <p:ph type="sldNum" sz="quarter" idx="12"/>
+          </p:nvPr>
+        </p:nvSpPr>
+        <p:spPr/>
+        <p:txBody>
+          <a:bodyPr/>
+          <a:lstStyle/>
+          <a:p>
+            <a:fld id="{3AB30462-0FD5-604F-8C98-DCC91BE84583}" type="slidenum">
+              <a:rPr lang="en-US" smtClean="0"/>
+              <a:t>11</a:t>
+            </a:fld>
+            <a:endParaRPr lang="en-US"/>
+          </a:p>
+        </p:txBody>
+      </p:sp>
+      <p:pic>
+        <p:nvPicPr>
+          <p:cNvPr id="3" name="Picture 2">
+            <a:extLst>
+              <a:ext uri="{FF2B5EF4-FFF2-40B4-BE49-F238E27FC236}">
+                <a16:creationId xmlns:a16="http://schemas.microsoft.com/office/drawing/2014/main" id="{ACBA3F86-C5E0-D85B-E2F7-1DFB95B96FEF}"/>
+              </a:ext>
+            </a:extLst>
+          </p:cNvPr>
+          <p:cNvPicPr>
+            <a:picLocks noChangeAspect="1"/>
+          </p:cNvPicPr>
+          <p:nvPr/>
+        </p:nvPicPr>
+        <p:blipFill>
+          <a:blip r:embed="rId2"/>
+          <a:stretch>
+            <a:fillRect/>
+          </a:stretch>
+        </p:blipFill>
+        <p:spPr>
+          <a:xfrm>
+            <a:off x="3045568" y="1788710"/>
+            <a:ext cx="6100864" cy="4469617"/>
+          </a:xfrm>
+          <a:prstGeom prst="rect">
+            <a:avLst/>
+          </a:prstGeom>
+        </p:spPr>
+      </p:pic>
+    </p:spTree>
+    <p:extLst>
+      <p:ext uri="{BB962C8B-B14F-4D97-AF65-F5344CB8AC3E}">
+        <p14:creationId xmlns:p14="http://schemas.microsoft.com/office/powerpoint/2010/main" val="3129117071"/>
+      </p:ext>
+    </p:extLst>
+  </p:cSld>
+  <p:clrMapOvr>
+    <a:masterClrMapping/>
+  </p:clrMapOvr>
+</p:sld>
+</file>
+
+<file path=ppt/slides/slide12.xml><?xml version="1.0" encoding="utf-8"?>
+<p:sld xmlns:a="http://schemas.openxmlformats.org/drawingml/2006/main" xmlns:r="http://schemas.openxmlformats.org/officeDocument/2006/relationships" xmlns:p="http://schemas.openxmlformats.org/presentationml/2006/main">
+  <p:cSld>
+    <p:spTree>
+      <p:nvGrpSpPr>
+        <p:cNvPr id="1" name=""/>
+        <p:cNvGrpSpPr/>
+        <p:nvPr/>
+      </p:nvGrpSpPr>
+      <p:grpSpPr>
+        <a:xfrm>
+          <a:off x="0" y="0"/>
+          <a:ext cx="0" cy="0"/>
+          <a:chOff x="0" y="0"/>
+          <a:chExt cx="0" cy="0"/>
+        </a:xfrm>
+      </p:grpSpPr>
+      <p:sp>
+        <p:nvSpPr>
+          <p:cNvPr id="2" name="Title 1">
+            <a:extLst>
+              <a:ext uri="{FF2B5EF4-FFF2-40B4-BE49-F238E27FC236}">
+                <a16:creationId xmlns:a16="http://schemas.microsoft.com/office/drawing/2014/main" id="{BC1F0577-539D-089A-9C49-702B1C8FC055}"/>
+              </a:ext>
+            </a:extLst>
+          </p:cNvPr>
+          <p:cNvSpPr>
+            <a:spLocks noGrp="1"/>
+          </p:cNvSpPr>
+          <p:nvPr>
+            <p:ph type="title"/>
+          </p:nvPr>
+        </p:nvSpPr>
+        <p:spPr/>
+        <p:txBody>
+          <a:bodyPr/>
+          <a:lstStyle/>
+          <a:p>
+            <a:r>
+              <a:rPr lang="en-US" dirty="0"/>
+              <a:t>Control internal flow</a:t>
+            </a:r>
+          </a:p>
+        </p:txBody>
+      </p:sp>
+      <p:sp>
+        <p:nvSpPr>
+          <p:cNvPr id="3" name="Content Placeholder 2">
+            <a:extLst>
+              <a:ext uri="{FF2B5EF4-FFF2-40B4-BE49-F238E27FC236}">
+                <a16:creationId xmlns:a16="http://schemas.microsoft.com/office/drawing/2014/main" id="{AA3383E5-8774-4FE0-1624-32B79CD5BAD1}"/>
+              </a:ext>
+            </a:extLst>
+          </p:cNvPr>
+          <p:cNvSpPr>
+            <a:spLocks noGrp="1"/>
+          </p:cNvSpPr>
+          <p:nvPr>
+            <p:ph idx="1"/>
+          </p:nvPr>
+        </p:nvSpPr>
+        <p:spPr/>
+        <p:txBody>
+          <a:bodyPr/>
+          <a:lstStyle/>
+          <a:p>
+            <a:endParaRPr lang="en-US"/>
+          </a:p>
+        </p:txBody>
+      </p:sp>
+      <p:sp>
+        <p:nvSpPr>
+          <p:cNvPr id="4" name="Slide Number Placeholder 3">
+            <a:extLst>
+              <a:ext uri="{FF2B5EF4-FFF2-40B4-BE49-F238E27FC236}">
+                <a16:creationId xmlns:a16="http://schemas.microsoft.com/office/drawing/2014/main" id="{C014916F-F150-F82B-C93D-8DBF7DF33F30}"/>
+              </a:ext>
+            </a:extLst>
+          </p:cNvPr>
+          <p:cNvSpPr>
+            <a:spLocks noGrp="1"/>
+          </p:cNvSpPr>
+          <p:nvPr>
+            <p:ph type="sldNum" sz="quarter" idx="12"/>
+          </p:nvPr>
+        </p:nvSpPr>
+        <p:spPr/>
+        <p:txBody>
+          <a:bodyPr/>
+          <a:lstStyle/>
+          <a:p>
+            <a:fld id="{3AB30462-0FD5-604F-8C98-DCC91BE84583}" type="slidenum">
+              <a:rPr lang="en-US" smtClean="0"/>
+              <a:t>12</a:t>
+            </a:fld>
+            <a:endParaRPr lang="en-US"/>
+          </a:p>
+        </p:txBody>
+      </p:sp>
+    </p:spTree>
+    <p:extLst>
+      <p:ext uri="{BB962C8B-B14F-4D97-AF65-F5344CB8AC3E}">
+        <p14:creationId xmlns:p14="http://schemas.microsoft.com/office/powerpoint/2010/main" val="1168188669"/>
+      </p:ext>
+    </p:extLst>
+  </p:cSld>
+  <p:clrMapOvr>
+    <a:masterClrMapping/>
+  </p:clrMapOvr>
+</p:sld>
+</file>
+
+<file path=ppt/slides/slide13.xml><?xml version="1.0" encoding="utf-8"?>
+<p:sld xmlns:a="http://schemas.openxmlformats.org/drawingml/2006/main" xmlns:r="http://schemas.openxmlformats.org/officeDocument/2006/relationships" xmlns:p="http://schemas.openxmlformats.org/presentationml/2006/main">
+  <p:cSld>
+    <p:spTree>
+      <p:nvGrpSpPr>
+        <p:cNvPr id="1" name=""/>
+        <p:cNvGrpSpPr/>
+        <p:nvPr/>
+      </p:nvGrpSpPr>
+      <p:grpSpPr>
+        <a:xfrm>
+          <a:off x="0" y="0"/>
+          <a:ext cx="0" cy="0"/>
+          <a:chOff x="0" y="0"/>
+          <a:chExt cx="0" cy="0"/>
+        </a:xfrm>
+      </p:grpSpPr>
+      <p:sp>
+        <p:nvSpPr>
+          <p:cNvPr id="4" name="Slide Number Placeholder 3">
+            <a:extLst>
+              <a:ext uri="{FF2B5EF4-FFF2-40B4-BE49-F238E27FC236}">
+                <a16:creationId xmlns:a16="http://schemas.microsoft.com/office/drawing/2014/main" id="{EA9A51AD-DAB4-490B-61FD-4BAD314648C2}"/>
+              </a:ext>
+            </a:extLst>
+          </p:cNvPr>
+          <p:cNvSpPr>
+            <a:spLocks noGrp="1"/>
+          </p:cNvSpPr>
+          <p:nvPr>
+            <p:ph type="sldNum" sz="quarter" idx="12"/>
+          </p:nvPr>
+        </p:nvSpPr>
+        <p:spPr/>
+        <p:txBody>
+          <a:bodyPr/>
+          <a:lstStyle/>
+          <a:p>
+            <a:fld id="{3AB30462-0FD5-604F-8C98-DCC91BE84583}" type="slidenum">
+              <a:rPr lang="en-US" smtClean="0"/>
+              <a:t>13</a:t>
             </a:fld>
             <a:endParaRPr lang="en-US"/>
           </a:p>
@@ -4076,7 +4501,7 @@
 </p:sld>
 </file>
 
-<file path=ppt/slides/slide3.xml><?xml version="1.0" encoding="utf-8"?>
+<file path=ppt/slides/slide14.xml><?xml version="1.0" encoding="utf-8"?>
 <p:sld xmlns:a="http://schemas.openxmlformats.org/drawingml/2006/main" xmlns:r="http://schemas.openxmlformats.org/officeDocument/2006/relationships" xmlns:p="http://schemas.openxmlformats.org/presentationml/2006/main">
   <p:cSld>
     <p:spTree>
@@ -4205,7 +4630,7 @@
           <a:p>
             <a:fld id="{3AB30462-0FD5-604F-8C98-DCC91BE84583}" type="slidenum">
               <a:rPr lang="en-US" smtClean="0"/>
-              <a:t>3</a:t>
+              <a:t>14</a:t>
             </a:fld>
             <a:endParaRPr lang="en-US"/>
           </a:p>
@@ -4215,6 +4640,550 @@
     <p:extLst>
       <p:ext uri="{BB962C8B-B14F-4D97-AF65-F5344CB8AC3E}">
         <p14:creationId xmlns:p14="http://schemas.microsoft.com/office/powerpoint/2010/main" val="4035265093"/>
+      </p:ext>
+    </p:extLst>
+  </p:cSld>
+  <p:clrMapOvr>
+    <a:masterClrMapping/>
+  </p:clrMapOvr>
+</p:sld>
+</file>
+
+<file path=ppt/slides/slide15.xml><?xml version="1.0" encoding="utf-8"?>
+<p:sld xmlns:a="http://schemas.openxmlformats.org/drawingml/2006/main" xmlns:r="http://schemas.openxmlformats.org/officeDocument/2006/relationships" xmlns:p="http://schemas.openxmlformats.org/presentationml/2006/main">
+  <p:cSld>
+    <p:spTree>
+      <p:nvGrpSpPr>
+        <p:cNvPr id="1" name=""/>
+        <p:cNvGrpSpPr/>
+        <p:nvPr/>
+      </p:nvGrpSpPr>
+      <p:grpSpPr>
+        <a:xfrm>
+          <a:off x="0" y="0"/>
+          <a:ext cx="0" cy="0"/>
+          <a:chOff x="0" y="0"/>
+          <a:chExt cx="0" cy="0"/>
+        </a:xfrm>
+      </p:grpSpPr>
+      <p:sp>
+        <p:nvSpPr>
+          <p:cNvPr id="2" name="Title 1">
+            <a:extLst>
+              <a:ext uri="{FF2B5EF4-FFF2-40B4-BE49-F238E27FC236}">
+                <a16:creationId xmlns:a16="http://schemas.microsoft.com/office/drawing/2014/main" id="{54C383C8-C9A0-D83C-05FD-A076AD9BF82A}"/>
+              </a:ext>
+            </a:extLst>
+          </p:cNvPr>
+          <p:cNvSpPr>
+            <a:spLocks noGrp="1"/>
+          </p:cNvSpPr>
+          <p:nvPr>
+            <p:ph type="title"/>
+          </p:nvPr>
+        </p:nvSpPr>
+        <p:spPr/>
+        <p:txBody>
+          <a:bodyPr/>
+          <a:lstStyle/>
+          <a:p>
+            <a:r>
+              <a:rPr lang="en-US" dirty="0"/>
+              <a:t>graphs</a:t>
+            </a:r>
+          </a:p>
+        </p:txBody>
+      </p:sp>
+      <p:sp>
+        <p:nvSpPr>
+          <p:cNvPr id="3" name="Content Placeholder 2">
+            <a:extLst>
+              <a:ext uri="{FF2B5EF4-FFF2-40B4-BE49-F238E27FC236}">
+                <a16:creationId xmlns:a16="http://schemas.microsoft.com/office/drawing/2014/main" id="{79F0DFB5-4990-2A42-F88C-E1CA4DF81D7F}"/>
+              </a:ext>
+            </a:extLst>
+          </p:cNvPr>
+          <p:cNvSpPr>
+            <a:spLocks noGrp="1"/>
+          </p:cNvSpPr>
+          <p:nvPr>
+            <p:ph idx="1"/>
+          </p:nvPr>
+        </p:nvSpPr>
+        <p:spPr/>
+        <p:txBody>
+          <a:bodyPr/>
+          <a:lstStyle/>
+          <a:p>
+            <a:endParaRPr lang="en-US"/>
+          </a:p>
+        </p:txBody>
+      </p:sp>
+      <p:sp>
+        <p:nvSpPr>
+          <p:cNvPr id="4" name="Slide Number Placeholder 3">
+            <a:extLst>
+              <a:ext uri="{FF2B5EF4-FFF2-40B4-BE49-F238E27FC236}">
+                <a16:creationId xmlns:a16="http://schemas.microsoft.com/office/drawing/2014/main" id="{F28A36EE-F0B7-2DFE-9C61-BB625B82429C}"/>
+              </a:ext>
+            </a:extLst>
+          </p:cNvPr>
+          <p:cNvSpPr>
+            <a:spLocks noGrp="1"/>
+          </p:cNvSpPr>
+          <p:nvPr>
+            <p:ph type="sldNum" sz="quarter" idx="12"/>
+          </p:nvPr>
+        </p:nvSpPr>
+        <p:spPr/>
+        <p:txBody>
+          <a:bodyPr/>
+          <a:lstStyle/>
+          <a:p>
+            <a:fld id="{3AB30462-0FD5-604F-8C98-DCC91BE84583}" type="slidenum">
+              <a:rPr lang="en-US" smtClean="0"/>
+              <a:t>15</a:t>
+            </a:fld>
+            <a:endParaRPr lang="en-US"/>
+          </a:p>
+        </p:txBody>
+      </p:sp>
+    </p:spTree>
+    <p:extLst>
+      <p:ext uri="{BB962C8B-B14F-4D97-AF65-F5344CB8AC3E}">
+        <p14:creationId xmlns:p14="http://schemas.microsoft.com/office/powerpoint/2010/main" val="217363334"/>
+      </p:ext>
+    </p:extLst>
+  </p:cSld>
+  <p:clrMapOvr>
+    <a:masterClrMapping/>
+  </p:clrMapOvr>
+</p:sld>
+</file>
+
+<file path=ppt/slides/slide16.xml><?xml version="1.0" encoding="utf-8"?>
+<p:sld xmlns:a="http://schemas.openxmlformats.org/drawingml/2006/main" xmlns:r="http://schemas.openxmlformats.org/officeDocument/2006/relationships" xmlns:p="http://schemas.openxmlformats.org/presentationml/2006/main">
+  <p:cSld>
+    <p:spTree>
+      <p:nvGrpSpPr>
+        <p:cNvPr id="1" name=""/>
+        <p:cNvGrpSpPr/>
+        <p:nvPr/>
+      </p:nvGrpSpPr>
+      <p:grpSpPr>
+        <a:xfrm>
+          <a:off x="0" y="0"/>
+          <a:ext cx="0" cy="0"/>
+          <a:chOff x="0" y="0"/>
+          <a:chExt cx="0" cy="0"/>
+        </a:xfrm>
+      </p:grpSpPr>
+      <p:sp>
+        <p:nvSpPr>
+          <p:cNvPr id="2" name="Title 1">
+            <a:extLst>
+              <a:ext uri="{FF2B5EF4-FFF2-40B4-BE49-F238E27FC236}">
+                <a16:creationId xmlns:a16="http://schemas.microsoft.com/office/drawing/2014/main" id="{6765A874-B4D6-D6CE-CBC2-3FAC8C2A6BF3}"/>
+              </a:ext>
+            </a:extLst>
+          </p:cNvPr>
+          <p:cNvSpPr>
+            <a:spLocks noGrp="1"/>
+          </p:cNvSpPr>
+          <p:nvPr>
+            <p:ph type="title"/>
+          </p:nvPr>
+        </p:nvSpPr>
+        <p:spPr/>
+        <p:txBody>
+          <a:bodyPr/>
+          <a:lstStyle/>
+          <a:p>
+            <a:r>
+              <a:rPr lang="en-US" dirty="0"/>
+              <a:t>Start from View</a:t>
+            </a:r>
+          </a:p>
+        </p:txBody>
+      </p:sp>
+      <p:sp>
+        <p:nvSpPr>
+          <p:cNvPr id="3" name="Content Placeholder 2">
+            <a:extLst>
+              <a:ext uri="{FF2B5EF4-FFF2-40B4-BE49-F238E27FC236}">
+                <a16:creationId xmlns:a16="http://schemas.microsoft.com/office/drawing/2014/main" id="{5BE3F98D-87FF-1DD4-2B3A-EC60A6E148F9}"/>
+              </a:ext>
+            </a:extLst>
+          </p:cNvPr>
+          <p:cNvSpPr>
+            <a:spLocks noGrp="1"/>
+          </p:cNvSpPr>
+          <p:nvPr>
+            <p:ph idx="1"/>
+          </p:nvPr>
+        </p:nvSpPr>
+        <p:spPr/>
+        <p:txBody>
+          <a:bodyPr/>
+          <a:lstStyle/>
+          <a:p>
+            <a:r>
+              <a:rPr lang="en-US" dirty="0"/>
+              <a:t>Simplest</a:t>
+            </a:r>
+          </a:p>
+          <a:p>
+            <a:endParaRPr lang="en-US" dirty="0"/>
+          </a:p>
+          <a:p>
+            <a:r>
+              <a:rPr lang="en-US" dirty="0"/>
+              <a:t>Show board</a:t>
+            </a:r>
+          </a:p>
+          <a:p>
+            <a:r>
+              <a:rPr lang="en-US" dirty="0"/>
+              <a:t>Show game status</a:t>
+            </a:r>
+          </a:p>
+          <a:p>
+            <a:pPr lvl="1"/>
+            <a:r>
+              <a:rPr lang="en-US" dirty="0"/>
+              <a:t>Not started yet (no other players)</a:t>
+            </a:r>
+          </a:p>
+          <a:p>
+            <a:pPr lvl="1"/>
+            <a:r>
+              <a:rPr lang="en-US" dirty="0"/>
+              <a:t>Started, show whose turn</a:t>
+            </a:r>
+          </a:p>
+          <a:p>
+            <a:pPr lvl="1"/>
+            <a:r>
+              <a:rPr lang="en-US" dirty="0"/>
+              <a:t>Ended (win or a draw)</a:t>
+            </a:r>
+          </a:p>
+          <a:p>
+            <a:pPr lvl="1"/>
+            <a:r>
+              <a:rPr lang="en-US" dirty="0"/>
+              <a:t>One player disconnected</a:t>
+            </a:r>
+          </a:p>
+        </p:txBody>
+      </p:sp>
+      <p:sp>
+        <p:nvSpPr>
+          <p:cNvPr id="4" name="Slide Number Placeholder 3">
+            <a:extLst>
+              <a:ext uri="{FF2B5EF4-FFF2-40B4-BE49-F238E27FC236}">
+                <a16:creationId xmlns:a16="http://schemas.microsoft.com/office/drawing/2014/main" id="{CF20BA6A-AA7A-ADE1-BD84-81DE3254A514}"/>
+              </a:ext>
+            </a:extLst>
+          </p:cNvPr>
+          <p:cNvSpPr>
+            <a:spLocks noGrp="1"/>
+          </p:cNvSpPr>
+          <p:nvPr>
+            <p:ph type="sldNum" sz="quarter" idx="12"/>
+          </p:nvPr>
+        </p:nvSpPr>
+        <p:spPr/>
+        <p:txBody>
+          <a:bodyPr/>
+          <a:lstStyle/>
+          <a:p>
+            <a:fld id="{3AB30462-0FD5-604F-8C98-DCC91BE84583}" type="slidenum">
+              <a:rPr lang="en-US" smtClean="0"/>
+              <a:t>16</a:t>
+            </a:fld>
+            <a:endParaRPr lang="en-US"/>
+          </a:p>
+        </p:txBody>
+      </p:sp>
+    </p:spTree>
+    <p:extLst>
+      <p:ext uri="{BB962C8B-B14F-4D97-AF65-F5344CB8AC3E}">
+        <p14:creationId xmlns:p14="http://schemas.microsoft.com/office/powerpoint/2010/main" val="1317759025"/>
+      </p:ext>
+    </p:extLst>
+  </p:cSld>
+  <p:clrMapOvr>
+    <a:masterClrMapping/>
+  </p:clrMapOvr>
+</p:sld>
+</file>
+
+<file path=ppt/slides/slide2.xml><?xml version="1.0" encoding="utf-8"?>
+<p:sld xmlns:a="http://schemas.openxmlformats.org/drawingml/2006/main" xmlns:r="http://schemas.openxmlformats.org/officeDocument/2006/relationships" xmlns:p="http://schemas.openxmlformats.org/presentationml/2006/main">
+  <p:cSld>
+    <p:spTree>
+      <p:nvGrpSpPr>
+        <p:cNvPr id="1" name=""/>
+        <p:cNvGrpSpPr/>
+        <p:nvPr/>
+      </p:nvGrpSpPr>
+      <p:grpSpPr>
+        <a:xfrm>
+          <a:off x="0" y="0"/>
+          <a:ext cx="0" cy="0"/>
+          <a:chOff x="0" y="0"/>
+          <a:chExt cx="0" cy="0"/>
+        </a:xfrm>
+      </p:grpSpPr>
+      <p:sp>
+        <p:nvSpPr>
+          <p:cNvPr id="2" name="Title 1">
+            <a:extLst>
+              <a:ext uri="{FF2B5EF4-FFF2-40B4-BE49-F238E27FC236}">
+                <a16:creationId xmlns:a16="http://schemas.microsoft.com/office/drawing/2014/main" id="{912ADD1D-ADF9-9B31-EF1E-06269898850C}"/>
+              </a:ext>
+            </a:extLst>
+          </p:cNvPr>
+          <p:cNvSpPr>
+            <a:spLocks noGrp="1"/>
+          </p:cNvSpPr>
+          <p:nvPr>
+            <p:ph type="title"/>
+          </p:nvPr>
+        </p:nvSpPr>
+        <p:spPr/>
+        <p:txBody>
+          <a:bodyPr/>
+          <a:lstStyle/>
+          <a:p>
+            <a:r>
+              <a:rPr lang="en-US" altLang="zh-CN" dirty="0"/>
+              <a:t>Gomoku</a:t>
+            </a:r>
+            <a:r>
+              <a:rPr lang="zh-CN" altLang="en-US" dirty="0"/>
+              <a:t> </a:t>
+            </a:r>
+            <a:r>
+              <a:rPr lang="en-US" altLang="zh-CN" dirty="0"/>
+              <a:t>architecture</a:t>
+            </a:r>
+            <a:r>
+              <a:rPr lang="zh-CN" altLang="en-US" dirty="0"/>
+              <a:t> </a:t>
+            </a:r>
+            <a:r>
+              <a:rPr lang="en-US" altLang="zh-CN" dirty="0"/>
+              <a:t>design</a:t>
+            </a:r>
+            <a:endParaRPr lang="en-US" dirty="0"/>
+          </a:p>
+        </p:txBody>
+      </p:sp>
+      <p:sp>
+        <p:nvSpPr>
+          <p:cNvPr id="4" name="Slide Number Placeholder 3">
+            <a:extLst>
+              <a:ext uri="{FF2B5EF4-FFF2-40B4-BE49-F238E27FC236}">
+                <a16:creationId xmlns:a16="http://schemas.microsoft.com/office/drawing/2014/main" id="{CD121A7D-458B-311A-97B6-A7CBBC86E54D}"/>
+              </a:ext>
+            </a:extLst>
+          </p:cNvPr>
+          <p:cNvSpPr>
+            <a:spLocks noGrp="1"/>
+          </p:cNvSpPr>
+          <p:nvPr>
+            <p:ph type="sldNum" sz="quarter" idx="12"/>
+          </p:nvPr>
+        </p:nvSpPr>
+        <p:spPr/>
+        <p:txBody>
+          <a:bodyPr/>
+          <a:lstStyle/>
+          <a:p>
+            <a:fld id="{3AB30462-0FD5-604F-8C98-DCC91BE84583}" type="slidenum">
+              <a:rPr lang="en-US" smtClean="0"/>
+              <a:t>2</a:t>
+            </a:fld>
+            <a:endParaRPr lang="en-US"/>
+          </a:p>
+        </p:txBody>
+      </p:sp>
+      <p:pic>
+        <p:nvPicPr>
+          <p:cNvPr id="7" name="Picture 6">
+            <a:extLst>
+              <a:ext uri="{FF2B5EF4-FFF2-40B4-BE49-F238E27FC236}">
+                <a16:creationId xmlns:a16="http://schemas.microsoft.com/office/drawing/2014/main" id="{6CDD77B0-76E1-E4F4-06D2-02CE6100E2EE}"/>
+              </a:ext>
+            </a:extLst>
+          </p:cNvPr>
+          <p:cNvPicPr>
+            <a:picLocks noChangeAspect="1"/>
+          </p:cNvPicPr>
+          <p:nvPr/>
+        </p:nvPicPr>
+        <p:blipFill>
+          <a:blip r:embed="rId2"/>
+          <a:stretch>
+            <a:fillRect/>
+          </a:stretch>
+        </p:blipFill>
+        <p:spPr>
+          <a:xfrm>
+            <a:off x="3001793" y="1798561"/>
+            <a:ext cx="6188413" cy="4449915"/>
+          </a:xfrm>
+          <a:prstGeom prst="rect">
+            <a:avLst/>
+          </a:prstGeom>
+        </p:spPr>
+      </p:pic>
+    </p:spTree>
+    <p:extLst>
+      <p:ext uri="{BB962C8B-B14F-4D97-AF65-F5344CB8AC3E}">
+        <p14:creationId xmlns:p14="http://schemas.microsoft.com/office/powerpoint/2010/main" val="3639542384"/>
+      </p:ext>
+    </p:extLst>
+  </p:cSld>
+  <p:clrMapOvr>
+    <a:masterClrMapping/>
+  </p:clrMapOvr>
+</p:sld>
+</file>
+
+<file path=ppt/slides/slide3.xml><?xml version="1.0" encoding="utf-8"?>
+<p:sld xmlns:a="http://schemas.openxmlformats.org/drawingml/2006/main" xmlns:r="http://schemas.openxmlformats.org/officeDocument/2006/relationships" xmlns:p="http://schemas.openxmlformats.org/presentationml/2006/main">
+  <p:cSld>
+    <p:spTree>
+      <p:nvGrpSpPr>
+        <p:cNvPr id="1" name="">
+          <a:extLst>
+            <a:ext uri="{FF2B5EF4-FFF2-40B4-BE49-F238E27FC236}">
+              <a16:creationId xmlns:a16="http://schemas.microsoft.com/office/drawing/2014/main" id="{5A632566-B836-6B57-0C79-3DF30F5D3E66}"/>
+            </a:ext>
+          </a:extLst>
+        </p:cNvPr>
+        <p:cNvGrpSpPr/>
+        <p:nvPr/>
+      </p:nvGrpSpPr>
+      <p:grpSpPr>
+        <a:xfrm>
+          <a:off x="0" y="0"/>
+          <a:ext cx="0" cy="0"/>
+          <a:chOff x="0" y="0"/>
+          <a:chExt cx="0" cy="0"/>
+        </a:xfrm>
+      </p:grpSpPr>
+      <p:sp>
+        <p:nvSpPr>
+          <p:cNvPr id="2" name="Title 1">
+            <a:extLst>
+              <a:ext uri="{FF2B5EF4-FFF2-40B4-BE49-F238E27FC236}">
+                <a16:creationId xmlns:a16="http://schemas.microsoft.com/office/drawing/2014/main" id="{885E1ED5-3D50-2FD9-6464-6CC5BC4E4FF4}"/>
+              </a:ext>
+            </a:extLst>
+          </p:cNvPr>
+          <p:cNvSpPr>
+            <a:spLocks noGrp="1"/>
+          </p:cNvSpPr>
+          <p:nvPr>
+            <p:ph type="title"/>
+          </p:nvPr>
+        </p:nvSpPr>
+        <p:spPr/>
+        <p:txBody>
+          <a:bodyPr/>
+          <a:lstStyle/>
+          <a:p>
+            <a:r>
+              <a:rPr lang="en-US" altLang="zh-CN" dirty="0"/>
+              <a:t>Gomoku</a:t>
+            </a:r>
+            <a:r>
+              <a:rPr lang="zh-CN" altLang="en-US" dirty="0"/>
+              <a:t> </a:t>
+            </a:r>
+            <a:r>
+              <a:rPr lang="en-US" altLang="zh-CN" dirty="0"/>
+              <a:t>architecture</a:t>
+            </a:r>
+            <a:r>
+              <a:rPr lang="zh-CN" altLang="en-US" dirty="0"/>
+              <a:t> </a:t>
+            </a:r>
+            <a:r>
+              <a:rPr lang="en-US" altLang="zh-CN" dirty="0"/>
+              <a:t>design</a:t>
+            </a:r>
+            <a:endParaRPr lang="en-US" dirty="0"/>
+          </a:p>
+        </p:txBody>
+      </p:sp>
+      <p:sp>
+        <p:nvSpPr>
+          <p:cNvPr id="4" name="Slide Number Placeholder 3">
+            <a:extLst>
+              <a:ext uri="{FF2B5EF4-FFF2-40B4-BE49-F238E27FC236}">
+                <a16:creationId xmlns:a16="http://schemas.microsoft.com/office/drawing/2014/main" id="{A8728770-42B7-C31D-9929-B6D7B9BE1CDA}"/>
+              </a:ext>
+            </a:extLst>
+          </p:cNvPr>
+          <p:cNvSpPr>
+            <a:spLocks noGrp="1"/>
+          </p:cNvSpPr>
+          <p:nvPr>
+            <p:ph type="sldNum" sz="quarter" idx="12"/>
+          </p:nvPr>
+        </p:nvSpPr>
+        <p:spPr/>
+        <p:txBody>
+          <a:bodyPr/>
+          <a:lstStyle/>
+          <a:p>
+            <a:fld id="{3AB30462-0FD5-604F-8C98-DCC91BE84583}" type="slidenum">
+              <a:rPr lang="en-US" smtClean="0"/>
+              <a:t>3</a:t>
+            </a:fld>
+            <a:endParaRPr lang="en-US"/>
+          </a:p>
+        </p:txBody>
+      </p:sp>
+      <p:pic>
+        <p:nvPicPr>
+          <p:cNvPr id="3" name="Picture 2">
+            <a:extLst>
+              <a:ext uri="{FF2B5EF4-FFF2-40B4-BE49-F238E27FC236}">
+                <a16:creationId xmlns:a16="http://schemas.microsoft.com/office/drawing/2014/main" id="{8C81CE6D-6EFD-E7AE-74DD-3D47898A65B5}"/>
+              </a:ext>
+            </a:extLst>
+          </p:cNvPr>
+          <p:cNvPicPr>
+            <a:picLocks noChangeAspect="1"/>
+          </p:cNvPicPr>
+          <p:nvPr/>
+        </p:nvPicPr>
+        <p:blipFill>
+          <a:blip r:embed="rId2"/>
+          <a:stretch>
+            <a:fillRect/>
+          </a:stretch>
+        </p:blipFill>
+        <p:spPr>
+          <a:xfrm>
+            <a:off x="2928836" y="2001589"/>
+            <a:ext cx="6334328" cy="4096017"/>
+          </a:xfrm>
+          <a:prstGeom prst="rect">
+            <a:avLst/>
+          </a:prstGeom>
+        </p:spPr>
+      </p:pic>
+    </p:spTree>
+    <p:extLst>
+      <p:ext uri="{BB962C8B-B14F-4D97-AF65-F5344CB8AC3E}">
+        <p14:creationId xmlns:p14="http://schemas.microsoft.com/office/powerpoint/2010/main" val="1264998470"/>
       </p:ext>
     </p:extLst>
   </p:cSld>
@@ -4246,7 +5215,7 @@
           <p:cNvPr id="2" name="Title 1">
             <a:extLst>
               <a:ext uri="{FF2B5EF4-FFF2-40B4-BE49-F238E27FC236}">
-                <a16:creationId xmlns:a16="http://schemas.microsoft.com/office/drawing/2014/main" id="{54C383C8-C9A0-D83C-05FD-A076AD9BF82A}"/>
+                <a16:creationId xmlns:a16="http://schemas.microsoft.com/office/drawing/2014/main" id="{038B684A-45E6-5977-0DBC-4F5BFF5EEB1F}"/>
               </a:ext>
             </a:extLst>
           </p:cNvPr>
@@ -4262,7 +5231,10 @@
           <a:bodyPr/>
           <a:lstStyle/>
           <a:p>
-            <a:endParaRPr lang="en-US"/>
+            <a:r>
+              <a:rPr lang="en-US" dirty="0"/>
+              <a:t>Start our rapid iterations with View</a:t>
+            </a:r>
           </a:p>
         </p:txBody>
       </p:sp>
@@ -4271,7 +5243,7 @@
           <p:cNvPr id="3" name="Content Placeholder 2">
             <a:extLst>
               <a:ext uri="{FF2B5EF4-FFF2-40B4-BE49-F238E27FC236}">
-                <a16:creationId xmlns:a16="http://schemas.microsoft.com/office/drawing/2014/main" id="{79F0DFB5-4990-2A42-F88C-E1CA4DF81D7F}"/>
+                <a16:creationId xmlns:a16="http://schemas.microsoft.com/office/drawing/2014/main" id="{8942FD39-9E95-C2A9-DFD3-14449E352A20}"/>
               </a:ext>
             </a:extLst>
           </p:cNvPr>
@@ -4287,7 +5259,26 @@
           <a:bodyPr/>
           <a:lstStyle/>
           <a:p>
-            <a:endParaRPr lang="en-US"/>
+            <a:r>
+              <a:rPr lang="en-US" dirty="0"/>
+              <a:t>What should the view be like?</a:t>
+            </a:r>
+          </a:p>
+          <a:p>
+            <a:pPr lvl="1"/>
+            <a:r>
+              <a:rPr lang="en-US" dirty="0"/>
+              <a:t>I have some idea, but am not sure exactly</a:t>
+            </a:r>
+          </a:p>
+          <a:p>
+            <a:endParaRPr lang="en-US" dirty="0"/>
+          </a:p>
+          <a:p>
+            <a:r>
+              <a:rPr lang="en-US" dirty="0"/>
+              <a:t>Let’s build a quick iteration and get customer feedback</a:t>
+            </a:r>
           </a:p>
         </p:txBody>
       </p:sp>
@@ -4296,7 +5287,7 @@
           <p:cNvPr id="4" name="Slide Number Placeholder 3">
             <a:extLst>
               <a:ext uri="{FF2B5EF4-FFF2-40B4-BE49-F238E27FC236}">
-                <a16:creationId xmlns:a16="http://schemas.microsoft.com/office/drawing/2014/main" id="{F28A36EE-F0B7-2DFE-9C61-BB625B82429C}"/>
+                <a16:creationId xmlns:a16="http://schemas.microsoft.com/office/drawing/2014/main" id="{B5E77A75-4CD8-1868-94F7-92339CDBF2B8}"/>
               </a:ext>
             </a:extLst>
           </p:cNvPr>
@@ -4323,7 +5314,718 @@
     </p:spTree>
     <p:extLst>
       <p:ext uri="{BB962C8B-B14F-4D97-AF65-F5344CB8AC3E}">
-        <p14:creationId xmlns:p14="http://schemas.microsoft.com/office/powerpoint/2010/main" val="217363334"/>
+        <p14:creationId xmlns:p14="http://schemas.microsoft.com/office/powerpoint/2010/main" val="632894019"/>
+      </p:ext>
+    </p:extLst>
+  </p:cSld>
+  <p:clrMapOvr>
+    <a:masterClrMapping/>
+  </p:clrMapOvr>
+</p:sld>
+</file>
+
+<file path=ppt/slides/slide5.xml><?xml version="1.0" encoding="utf-8"?>
+<p:sld xmlns:a="http://schemas.openxmlformats.org/drawingml/2006/main" xmlns:r="http://schemas.openxmlformats.org/officeDocument/2006/relationships" xmlns:p="http://schemas.openxmlformats.org/presentationml/2006/main">
+  <p:cSld>
+    <p:spTree>
+      <p:nvGrpSpPr>
+        <p:cNvPr id="1" name=""/>
+        <p:cNvGrpSpPr/>
+        <p:nvPr/>
+      </p:nvGrpSpPr>
+      <p:grpSpPr>
+        <a:xfrm>
+          <a:off x="0" y="0"/>
+          <a:ext cx="0" cy="0"/>
+          <a:chOff x="0" y="0"/>
+          <a:chExt cx="0" cy="0"/>
+        </a:xfrm>
+      </p:grpSpPr>
+      <p:sp>
+        <p:nvSpPr>
+          <p:cNvPr id="2" name="Title 1">
+            <a:extLst>
+              <a:ext uri="{FF2B5EF4-FFF2-40B4-BE49-F238E27FC236}">
+                <a16:creationId xmlns:a16="http://schemas.microsoft.com/office/drawing/2014/main" id="{65C876D8-97DB-33C4-F7AF-70DE3515D406}"/>
+              </a:ext>
+            </a:extLst>
+          </p:cNvPr>
+          <p:cNvSpPr>
+            <a:spLocks noGrp="1"/>
+          </p:cNvSpPr>
+          <p:nvPr>
+            <p:ph type="title"/>
+          </p:nvPr>
+        </p:nvSpPr>
+        <p:spPr/>
+        <p:txBody>
+          <a:bodyPr/>
+          <a:lstStyle/>
+          <a:p>
+            <a:r>
+              <a:rPr lang="en-US" dirty="0"/>
+              <a:t>Possible Scenario #1</a:t>
+            </a:r>
+          </a:p>
+        </p:txBody>
+      </p:sp>
+      <p:sp>
+        <p:nvSpPr>
+          <p:cNvPr id="4" name="Slide Number Placeholder 3">
+            <a:extLst>
+              <a:ext uri="{FF2B5EF4-FFF2-40B4-BE49-F238E27FC236}">
+                <a16:creationId xmlns:a16="http://schemas.microsoft.com/office/drawing/2014/main" id="{3C711DA1-A4E5-8354-5F4C-237CDD4E4BF1}"/>
+              </a:ext>
+            </a:extLst>
+          </p:cNvPr>
+          <p:cNvSpPr>
+            <a:spLocks noGrp="1"/>
+          </p:cNvSpPr>
+          <p:nvPr>
+            <p:ph type="sldNum" sz="quarter" idx="12"/>
+          </p:nvPr>
+        </p:nvSpPr>
+        <p:spPr/>
+        <p:txBody>
+          <a:bodyPr/>
+          <a:lstStyle/>
+          <a:p>
+            <a:fld id="{3AB30462-0FD5-604F-8C98-DCC91BE84583}" type="slidenum">
+              <a:rPr lang="en-US" smtClean="0"/>
+              <a:t>5</a:t>
+            </a:fld>
+            <a:endParaRPr lang="en-US"/>
+          </a:p>
+        </p:txBody>
+      </p:sp>
+      <p:sp>
+        <p:nvSpPr>
+          <p:cNvPr id="6" name="TextBox 5">
+            <a:extLst>
+              <a:ext uri="{FF2B5EF4-FFF2-40B4-BE49-F238E27FC236}">
+                <a16:creationId xmlns:a16="http://schemas.microsoft.com/office/drawing/2014/main" id="{2442DBC6-5390-2F52-FF28-2C82E5D2EA48}"/>
+              </a:ext>
+            </a:extLst>
+          </p:cNvPr>
+          <p:cNvSpPr txBox="1"/>
+          <p:nvPr/>
+        </p:nvSpPr>
+        <p:spPr>
+          <a:xfrm>
+            <a:off x="1023256" y="3577987"/>
+            <a:ext cx="1743298" cy="369332"/>
+          </a:xfrm>
+          <a:prstGeom prst="rect">
+            <a:avLst/>
+          </a:prstGeom>
+          <a:noFill/>
+        </p:spPr>
+        <p:txBody>
+          <a:bodyPr wrap="none" rtlCol="0">
+            <a:spAutoFit/>
+          </a:bodyPr>
+          <a:lstStyle/>
+          <a:p>
+            <a:r>
+              <a:rPr lang="en-US" dirty="0"/>
+              <a:t>This is playing … </a:t>
+            </a:r>
+          </a:p>
+        </p:txBody>
+      </p:sp>
+      <p:pic>
+        <p:nvPicPr>
+          <p:cNvPr id="10" name="Picture 9">
+            <a:extLst>
+              <a:ext uri="{FF2B5EF4-FFF2-40B4-BE49-F238E27FC236}">
+                <a16:creationId xmlns:a16="http://schemas.microsoft.com/office/drawing/2014/main" id="{39D63772-D0C7-9F9E-7737-56C5F20D8A58}"/>
+              </a:ext>
+            </a:extLst>
+          </p:cNvPr>
+          <p:cNvPicPr>
+            <a:picLocks noChangeAspect="1"/>
+          </p:cNvPicPr>
+          <p:nvPr/>
+        </p:nvPicPr>
+        <p:blipFill>
+          <a:blip r:embed="rId2"/>
+          <a:stretch>
+            <a:fillRect/>
+          </a:stretch>
+        </p:blipFill>
+        <p:spPr>
+          <a:xfrm>
+            <a:off x="3682937" y="1449868"/>
+            <a:ext cx="4826125" cy="5147303"/>
+          </a:xfrm>
+          <a:prstGeom prst="rect">
+            <a:avLst/>
+          </a:prstGeom>
+        </p:spPr>
+      </p:pic>
+    </p:spTree>
+    <p:extLst>
+      <p:ext uri="{BB962C8B-B14F-4D97-AF65-F5344CB8AC3E}">
+        <p14:creationId xmlns:p14="http://schemas.microsoft.com/office/powerpoint/2010/main" val="3168049645"/>
+      </p:ext>
+    </p:extLst>
+  </p:cSld>
+  <p:clrMapOvr>
+    <a:masterClrMapping/>
+  </p:clrMapOvr>
+</p:sld>
+</file>
+
+<file path=ppt/slides/slide6.xml><?xml version="1.0" encoding="utf-8"?>
+<p:sld xmlns:a="http://schemas.openxmlformats.org/drawingml/2006/main" xmlns:r="http://schemas.openxmlformats.org/officeDocument/2006/relationships" xmlns:p="http://schemas.openxmlformats.org/presentationml/2006/main">
+  <p:cSld>
+    <p:spTree>
+      <p:nvGrpSpPr>
+        <p:cNvPr id="1" name=""/>
+        <p:cNvGrpSpPr/>
+        <p:nvPr/>
+      </p:nvGrpSpPr>
+      <p:grpSpPr>
+        <a:xfrm>
+          <a:off x="0" y="0"/>
+          <a:ext cx="0" cy="0"/>
+          <a:chOff x="0" y="0"/>
+          <a:chExt cx="0" cy="0"/>
+        </a:xfrm>
+      </p:grpSpPr>
+      <p:sp>
+        <p:nvSpPr>
+          <p:cNvPr id="2" name="Title 1">
+            <a:extLst>
+              <a:ext uri="{FF2B5EF4-FFF2-40B4-BE49-F238E27FC236}">
+                <a16:creationId xmlns:a16="http://schemas.microsoft.com/office/drawing/2014/main" id="{196D3EC5-AD3F-7342-C6CC-4CEFA46C2AFA}"/>
+              </a:ext>
+            </a:extLst>
+          </p:cNvPr>
+          <p:cNvSpPr>
+            <a:spLocks noGrp="1"/>
+          </p:cNvSpPr>
+          <p:nvPr>
+            <p:ph type="title"/>
+          </p:nvPr>
+        </p:nvSpPr>
+        <p:spPr/>
+        <p:txBody>
+          <a:bodyPr/>
+          <a:lstStyle/>
+          <a:p>
+            <a:r>
+              <a:rPr lang="en-US" dirty="0"/>
+              <a:t>Possible Scenario #2</a:t>
+            </a:r>
+          </a:p>
+        </p:txBody>
+      </p:sp>
+      <p:sp>
+        <p:nvSpPr>
+          <p:cNvPr id="4" name="Slide Number Placeholder 3">
+            <a:extLst>
+              <a:ext uri="{FF2B5EF4-FFF2-40B4-BE49-F238E27FC236}">
+                <a16:creationId xmlns:a16="http://schemas.microsoft.com/office/drawing/2014/main" id="{2DBA458E-AFE9-D4D4-D735-9B2E12F6CFF5}"/>
+              </a:ext>
+            </a:extLst>
+          </p:cNvPr>
+          <p:cNvSpPr>
+            <a:spLocks noGrp="1"/>
+          </p:cNvSpPr>
+          <p:nvPr>
+            <p:ph type="sldNum" sz="quarter" idx="12"/>
+          </p:nvPr>
+        </p:nvSpPr>
+        <p:spPr/>
+        <p:txBody>
+          <a:bodyPr/>
+          <a:lstStyle/>
+          <a:p>
+            <a:fld id="{3AB30462-0FD5-604F-8C98-DCC91BE84583}" type="slidenum">
+              <a:rPr lang="en-US" smtClean="0"/>
+              <a:t>6</a:t>
+            </a:fld>
+            <a:endParaRPr lang="en-US"/>
+          </a:p>
+        </p:txBody>
+      </p:sp>
+      <p:sp>
+        <p:nvSpPr>
+          <p:cNvPr id="6" name="TextBox 5">
+            <a:extLst>
+              <a:ext uri="{FF2B5EF4-FFF2-40B4-BE49-F238E27FC236}">
+                <a16:creationId xmlns:a16="http://schemas.microsoft.com/office/drawing/2014/main" id="{D3723720-4A67-BE2F-E139-830D421EE08B}"/>
+              </a:ext>
+            </a:extLst>
+          </p:cNvPr>
+          <p:cNvSpPr txBox="1"/>
+          <p:nvPr/>
+        </p:nvSpPr>
+        <p:spPr>
+          <a:xfrm>
+            <a:off x="435054" y="3525514"/>
+            <a:ext cx="3028073" cy="646331"/>
+          </a:xfrm>
+          <a:prstGeom prst="rect">
+            <a:avLst/>
+          </a:prstGeom>
+          <a:noFill/>
+        </p:spPr>
+        <p:txBody>
+          <a:bodyPr wrap="none" rtlCol="0">
+            <a:spAutoFit/>
+          </a:bodyPr>
+          <a:lstStyle/>
+          <a:p>
+            <a:r>
+              <a:rPr lang="en-US" dirty="0"/>
+              <a:t>You joined, but another player</a:t>
+            </a:r>
+          </a:p>
+          <a:p>
+            <a:r>
+              <a:rPr lang="en-US" dirty="0"/>
+              <a:t>has not joined yet</a:t>
+            </a:r>
+          </a:p>
+        </p:txBody>
+      </p:sp>
+      <p:pic>
+        <p:nvPicPr>
+          <p:cNvPr id="7" name="Picture 6">
+            <a:extLst>
+              <a:ext uri="{FF2B5EF4-FFF2-40B4-BE49-F238E27FC236}">
+                <a16:creationId xmlns:a16="http://schemas.microsoft.com/office/drawing/2014/main" id="{DCCFAAAE-ECE9-47C2-4082-B09187A5053A}"/>
+              </a:ext>
+            </a:extLst>
+          </p:cNvPr>
+          <p:cNvPicPr>
+            <a:picLocks noChangeAspect="1"/>
+          </p:cNvPicPr>
+          <p:nvPr/>
+        </p:nvPicPr>
+        <p:blipFill>
+          <a:blip r:embed="rId2"/>
+          <a:stretch>
+            <a:fillRect/>
+          </a:stretch>
+        </p:blipFill>
+        <p:spPr>
+          <a:xfrm>
+            <a:off x="3636069" y="1469949"/>
+            <a:ext cx="4919862" cy="5236445"/>
+          </a:xfrm>
+          <a:prstGeom prst="rect">
+            <a:avLst/>
+          </a:prstGeom>
+        </p:spPr>
+      </p:pic>
+    </p:spTree>
+    <p:extLst>
+      <p:ext uri="{BB962C8B-B14F-4D97-AF65-F5344CB8AC3E}">
+        <p14:creationId xmlns:p14="http://schemas.microsoft.com/office/powerpoint/2010/main" val="3453764192"/>
+      </p:ext>
+    </p:extLst>
+  </p:cSld>
+  <p:clrMapOvr>
+    <a:masterClrMapping/>
+  </p:clrMapOvr>
+</p:sld>
+</file>
+
+<file path=ppt/slides/slide7.xml><?xml version="1.0" encoding="utf-8"?>
+<p:sld xmlns:a="http://schemas.openxmlformats.org/drawingml/2006/main" xmlns:r="http://schemas.openxmlformats.org/officeDocument/2006/relationships" xmlns:p="http://schemas.openxmlformats.org/presentationml/2006/main">
+  <p:cSld>
+    <p:spTree>
+      <p:nvGrpSpPr>
+        <p:cNvPr id="1" name=""/>
+        <p:cNvGrpSpPr/>
+        <p:nvPr/>
+      </p:nvGrpSpPr>
+      <p:grpSpPr>
+        <a:xfrm>
+          <a:off x="0" y="0"/>
+          <a:ext cx="0" cy="0"/>
+          <a:chOff x="0" y="0"/>
+          <a:chExt cx="0" cy="0"/>
+        </a:xfrm>
+      </p:grpSpPr>
+      <p:sp>
+        <p:nvSpPr>
+          <p:cNvPr id="2" name="Title 1">
+            <a:extLst>
+              <a:ext uri="{FF2B5EF4-FFF2-40B4-BE49-F238E27FC236}">
+                <a16:creationId xmlns:a16="http://schemas.microsoft.com/office/drawing/2014/main" id="{C1934CCC-9252-B8E1-1A56-C82A137EFDC7}"/>
+              </a:ext>
+            </a:extLst>
+          </p:cNvPr>
+          <p:cNvSpPr>
+            <a:spLocks noGrp="1"/>
+          </p:cNvSpPr>
+          <p:nvPr>
+            <p:ph type="title"/>
+          </p:nvPr>
+        </p:nvSpPr>
+        <p:spPr/>
+        <p:txBody>
+          <a:bodyPr/>
+          <a:lstStyle/>
+          <a:p>
+            <a:r>
+              <a:rPr lang="en-US" dirty="0"/>
+              <a:t>Possible Scenario #3</a:t>
+            </a:r>
+          </a:p>
+        </p:txBody>
+      </p:sp>
+      <p:sp>
+        <p:nvSpPr>
+          <p:cNvPr id="4" name="Slide Number Placeholder 3">
+            <a:extLst>
+              <a:ext uri="{FF2B5EF4-FFF2-40B4-BE49-F238E27FC236}">
+                <a16:creationId xmlns:a16="http://schemas.microsoft.com/office/drawing/2014/main" id="{9F222BC9-2D89-4B4C-F72E-9247ED607950}"/>
+              </a:ext>
+            </a:extLst>
+          </p:cNvPr>
+          <p:cNvSpPr>
+            <a:spLocks noGrp="1"/>
+          </p:cNvSpPr>
+          <p:nvPr>
+            <p:ph type="sldNum" sz="quarter" idx="12"/>
+          </p:nvPr>
+        </p:nvSpPr>
+        <p:spPr/>
+        <p:txBody>
+          <a:bodyPr/>
+          <a:lstStyle/>
+          <a:p>
+            <a:fld id="{3AB30462-0FD5-604F-8C98-DCC91BE84583}" type="slidenum">
+              <a:rPr lang="en-US" smtClean="0"/>
+              <a:t>7</a:t>
+            </a:fld>
+            <a:endParaRPr lang="en-US"/>
+          </a:p>
+        </p:txBody>
+      </p:sp>
+      <p:pic>
+        <p:nvPicPr>
+          <p:cNvPr id="5" name="Picture 4">
+            <a:extLst>
+              <a:ext uri="{FF2B5EF4-FFF2-40B4-BE49-F238E27FC236}">
+                <a16:creationId xmlns:a16="http://schemas.microsoft.com/office/drawing/2014/main" id="{569915C5-EC01-160E-DB6F-7F5229698F33}"/>
+              </a:ext>
+            </a:extLst>
+          </p:cNvPr>
+          <p:cNvPicPr>
+            <a:picLocks noChangeAspect="1"/>
+          </p:cNvPicPr>
+          <p:nvPr/>
+        </p:nvPicPr>
+        <p:blipFill>
+          <a:blip r:embed="rId2"/>
+          <a:stretch>
+            <a:fillRect/>
+          </a:stretch>
+        </p:blipFill>
+        <p:spPr>
+          <a:xfrm>
+            <a:off x="3782083" y="1463674"/>
+            <a:ext cx="4627834" cy="5257801"/>
+          </a:xfrm>
+          <a:prstGeom prst="rect">
+            <a:avLst/>
+          </a:prstGeom>
+        </p:spPr>
+      </p:pic>
+      <p:sp>
+        <p:nvSpPr>
+          <p:cNvPr id="6" name="TextBox 5">
+            <a:extLst>
+              <a:ext uri="{FF2B5EF4-FFF2-40B4-BE49-F238E27FC236}">
+                <a16:creationId xmlns:a16="http://schemas.microsoft.com/office/drawing/2014/main" id="{1C3F38A7-FDFB-9C19-E9EB-EFE9F4B0F80D}"/>
+              </a:ext>
+            </a:extLst>
+          </p:cNvPr>
+          <p:cNvSpPr txBox="1"/>
+          <p:nvPr/>
+        </p:nvSpPr>
+        <p:spPr>
+          <a:xfrm>
+            <a:off x="740229" y="3570515"/>
+            <a:ext cx="2737865" cy="369332"/>
+          </a:xfrm>
+          <a:prstGeom prst="rect">
+            <a:avLst/>
+          </a:prstGeom>
+          <a:noFill/>
+        </p:spPr>
+        <p:txBody>
+          <a:bodyPr wrap="none" rtlCol="0">
+            <a:spAutoFit/>
+          </a:bodyPr>
+          <a:lstStyle/>
+          <a:p>
+            <a:r>
+              <a:rPr lang="en-US" dirty="0"/>
+              <a:t>One of the players has won</a:t>
+            </a:r>
+          </a:p>
+        </p:txBody>
+      </p:sp>
+    </p:spTree>
+    <p:extLst>
+      <p:ext uri="{BB962C8B-B14F-4D97-AF65-F5344CB8AC3E}">
+        <p14:creationId xmlns:p14="http://schemas.microsoft.com/office/powerpoint/2010/main" val="1806508039"/>
+      </p:ext>
+    </p:extLst>
+  </p:cSld>
+  <p:clrMapOvr>
+    <a:masterClrMapping/>
+  </p:clrMapOvr>
+</p:sld>
+</file>
+
+<file path=ppt/slides/slide8.xml><?xml version="1.0" encoding="utf-8"?>
+<p:sld xmlns:a="http://schemas.openxmlformats.org/drawingml/2006/main" xmlns:r="http://schemas.openxmlformats.org/officeDocument/2006/relationships" xmlns:p="http://schemas.openxmlformats.org/presentationml/2006/main">
+  <p:cSld>
+    <p:spTree>
+      <p:nvGrpSpPr>
+        <p:cNvPr id="1" name=""/>
+        <p:cNvGrpSpPr/>
+        <p:nvPr/>
+      </p:nvGrpSpPr>
+      <p:grpSpPr>
+        <a:xfrm>
+          <a:off x="0" y="0"/>
+          <a:ext cx="0" cy="0"/>
+          <a:chOff x="0" y="0"/>
+          <a:chExt cx="0" cy="0"/>
+        </a:xfrm>
+      </p:grpSpPr>
+      <p:sp>
+        <p:nvSpPr>
+          <p:cNvPr id="2" name="Title 1">
+            <a:extLst>
+              <a:ext uri="{FF2B5EF4-FFF2-40B4-BE49-F238E27FC236}">
+                <a16:creationId xmlns:a16="http://schemas.microsoft.com/office/drawing/2014/main" id="{131F920D-8C30-3B74-617D-7B97F488778D}"/>
+              </a:ext>
+            </a:extLst>
+          </p:cNvPr>
+          <p:cNvSpPr>
+            <a:spLocks noGrp="1"/>
+          </p:cNvSpPr>
+          <p:nvPr>
+            <p:ph type="title"/>
+          </p:nvPr>
+        </p:nvSpPr>
+        <p:spPr/>
+        <p:txBody>
+          <a:bodyPr/>
+          <a:lstStyle/>
+          <a:p>
+            <a:r>
+              <a:rPr lang="en-US" dirty="0"/>
+              <a:t>Other Scenarios</a:t>
+            </a:r>
+          </a:p>
+        </p:txBody>
+      </p:sp>
+      <p:sp>
+        <p:nvSpPr>
+          <p:cNvPr id="3" name="Content Placeholder 2">
+            <a:extLst>
+              <a:ext uri="{FF2B5EF4-FFF2-40B4-BE49-F238E27FC236}">
+                <a16:creationId xmlns:a16="http://schemas.microsoft.com/office/drawing/2014/main" id="{CE5A39B1-3E47-6CFA-D91F-DAF8148A7C87}"/>
+              </a:ext>
+            </a:extLst>
+          </p:cNvPr>
+          <p:cNvSpPr>
+            <a:spLocks noGrp="1"/>
+          </p:cNvSpPr>
+          <p:nvPr>
+            <p:ph idx="1"/>
+          </p:nvPr>
+        </p:nvSpPr>
+        <p:spPr/>
+        <p:txBody>
+          <a:bodyPr/>
+          <a:lstStyle/>
+          <a:p>
+            <a:r>
+              <a:rPr lang="en-US" dirty="0"/>
+              <a:t>There’s a draw at the end of the game</a:t>
+            </a:r>
+          </a:p>
+          <a:p>
+            <a:r>
+              <a:rPr lang="en-US" dirty="0"/>
+              <a:t>You or your opponent gets disconnected</a:t>
+            </a:r>
+          </a:p>
+          <a:p>
+            <a:endParaRPr lang="en-US" dirty="0"/>
+          </a:p>
+          <a:p>
+            <a:r>
+              <a:rPr lang="en-US" dirty="0"/>
+              <a:t>Any other scenarios?</a:t>
+            </a:r>
+          </a:p>
+        </p:txBody>
+      </p:sp>
+      <p:sp>
+        <p:nvSpPr>
+          <p:cNvPr id="4" name="Slide Number Placeholder 3">
+            <a:extLst>
+              <a:ext uri="{FF2B5EF4-FFF2-40B4-BE49-F238E27FC236}">
+                <a16:creationId xmlns:a16="http://schemas.microsoft.com/office/drawing/2014/main" id="{99304360-CD0E-8FD1-91B7-2428F0E8CF91}"/>
+              </a:ext>
+            </a:extLst>
+          </p:cNvPr>
+          <p:cNvSpPr>
+            <a:spLocks noGrp="1"/>
+          </p:cNvSpPr>
+          <p:nvPr>
+            <p:ph type="sldNum" sz="quarter" idx="12"/>
+          </p:nvPr>
+        </p:nvSpPr>
+        <p:spPr/>
+        <p:txBody>
+          <a:bodyPr/>
+          <a:lstStyle/>
+          <a:p>
+            <a:fld id="{3AB30462-0FD5-604F-8C98-DCC91BE84583}" type="slidenum">
+              <a:rPr lang="en-US" smtClean="0"/>
+              <a:t>8</a:t>
+            </a:fld>
+            <a:endParaRPr lang="en-US"/>
+          </a:p>
+        </p:txBody>
+      </p:sp>
+    </p:spTree>
+    <p:extLst>
+      <p:ext uri="{BB962C8B-B14F-4D97-AF65-F5344CB8AC3E}">
+        <p14:creationId xmlns:p14="http://schemas.microsoft.com/office/powerpoint/2010/main" val="3162144168"/>
+      </p:ext>
+    </p:extLst>
+  </p:cSld>
+  <p:clrMapOvr>
+    <a:masterClrMapping/>
+  </p:clrMapOvr>
+</p:sld>
+</file>
+
+<file path=ppt/slides/slide9.xml><?xml version="1.0" encoding="utf-8"?>
+<p:sld xmlns:a="http://schemas.openxmlformats.org/drawingml/2006/main" xmlns:r="http://schemas.openxmlformats.org/officeDocument/2006/relationships" xmlns:p="http://schemas.openxmlformats.org/presentationml/2006/main">
+  <p:cSld>
+    <p:spTree>
+      <p:nvGrpSpPr>
+        <p:cNvPr id="1" name=""/>
+        <p:cNvGrpSpPr/>
+        <p:nvPr/>
+      </p:nvGrpSpPr>
+      <p:grpSpPr>
+        <a:xfrm>
+          <a:off x="0" y="0"/>
+          <a:ext cx="0" cy="0"/>
+          <a:chOff x="0" y="0"/>
+          <a:chExt cx="0" cy="0"/>
+        </a:xfrm>
+      </p:grpSpPr>
+      <p:sp>
+        <p:nvSpPr>
+          <p:cNvPr id="2" name="Title 1">
+            <a:extLst>
+              <a:ext uri="{FF2B5EF4-FFF2-40B4-BE49-F238E27FC236}">
+                <a16:creationId xmlns:a16="http://schemas.microsoft.com/office/drawing/2014/main" id="{9A34B76B-DB13-5BB7-EF17-38A017361BE6}"/>
+              </a:ext>
+            </a:extLst>
+          </p:cNvPr>
+          <p:cNvSpPr>
+            <a:spLocks noGrp="1"/>
+          </p:cNvSpPr>
+          <p:nvPr>
+            <p:ph type="title"/>
+          </p:nvPr>
+        </p:nvSpPr>
+        <p:spPr/>
+        <p:txBody>
+          <a:bodyPr/>
+          <a:lstStyle/>
+          <a:p>
+            <a:r>
+              <a:rPr lang="en-US" dirty="0"/>
+              <a:t>Customer feedback</a:t>
+            </a:r>
+          </a:p>
+        </p:txBody>
+      </p:sp>
+      <p:sp>
+        <p:nvSpPr>
+          <p:cNvPr id="3" name="Content Placeholder 2">
+            <a:extLst>
+              <a:ext uri="{FF2B5EF4-FFF2-40B4-BE49-F238E27FC236}">
+                <a16:creationId xmlns:a16="http://schemas.microsoft.com/office/drawing/2014/main" id="{796DED22-30E0-1B21-C4DA-359BEFB1F483}"/>
+              </a:ext>
+            </a:extLst>
+          </p:cNvPr>
+          <p:cNvSpPr>
+            <a:spLocks noGrp="1"/>
+          </p:cNvSpPr>
+          <p:nvPr>
+            <p:ph idx="1"/>
+          </p:nvPr>
+        </p:nvSpPr>
+        <p:spPr/>
+        <p:txBody>
+          <a:bodyPr/>
+          <a:lstStyle/>
+          <a:p>
+            <a:r>
+              <a:rPr lang="en-US" dirty="0"/>
+              <a:t>Customer: </a:t>
+            </a:r>
+            <a:r>
+              <a:rPr lang="en-US" i="1" dirty="0"/>
+              <a:t>in general this looks good! I was thinking that maybe there could be two additional buttons above the board, called “restart” and “undo”</a:t>
+            </a:r>
+          </a:p>
+        </p:txBody>
+      </p:sp>
+      <p:sp>
+        <p:nvSpPr>
+          <p:cNvPr id="4" name="Slide Number Placeholder 3">
+            <a:extLst>
+              <a:ext uri="{FF2B5EF4-FFF2-40B4-BE49-F238E27FC236}">
+                <a16:creationId xmlns:a16="http://schemas.microsoft.com/office/drawing/2014/main" id="{122C761C-EECC-D958-16BF-E9DA131B9A56}"/>
+              </a:ext>
+            </a:extLst>
+          </p:cNvPr>
+          <p:cNvSpPr>
+            <a:spLocks noGrp="1"/>
+          </p:cNvSpPr>
+          <p:nvPr>
+            <p:ph type="sldNum" sz="quarter" idx="12"/>
+          </p:nvPr>
+        </p:nvSpPr>
+        <p:spPr/>
+        <p:txBody>
+          <a:bodyPr/>
+          <a:lstStyle/>
+          <a:p>
+            <a:fld id="{3AB30462-0FD5-604F-8C98-DCC91BE84583}" type="slidenum">
+              <a:rPr lang="en-US" smtClean="0"/>
+              <a:t>9</a:t>
+            </a:fld>
+            <a:endParaRPr lang="en-US"/>
+          </a:p>
+        </p:txBody>
+      </p:sp>
+    </p:spTree>
+    <p:extLst>
+      <p:ext uri="{BB962C8B-B14F-4D97-AF65-F5344CB8AC3E}">
+        <p14:creationId xmlns:p14="http://schemas.microsoft.com/office/powerpoint/2010/main" val="1849179055"/>
       </p:ext>
     </p:extLst>
   </p:cSld>

--- a/slides/Lecture3.pptx
+++ b/slides/Lecture3.pptx
@@ -5,7 +5,7 @@
     <p:sldMasterId id="2147483648" r:id="rId1"/>
   </p:sldMasterIdLst>
   <p:notesMasterIdLst>
-    <p:notesMasterId r:id="rId18"/>
+    <p:notesMasterId r:id="rId21"/>
   </p:notesMasterIdLst>
   <p:sldIdLst>
     <p:sldId id="256" r:id="rId2"/>
@@ -18,12 +18,15 @@
     <p:sldId id="298" r:id="rId9"/>
     <p:sldId id="299" r:id="rId10"/>
     <p:sldId id="300" r:id="rId11"/>
-    <p:sldId id="302" r:id="rId12"/>
-    <p:sldId id="303" r:id="rId13"/>
-    <p:sldId id="289" r:id="rId14"/>
-    <p:sldId id="290" r:id="rId15"/>
-    <p:sldId id="291" r:id="rId16"/>
-    <p:sldId id="292" r:id="rId17"/>
+    <p:sldId id="304" r:id="rId12"/>
+    <p:sldId id="302" r:id="rId13"/>
+    <p:sldId id="305" r:id="rId14"/>
+    <p:sldId id="306" r:id="rId15"/>
+    <p:sldId id="303" r:id="rId16"/>
+    <p:sldId id="289" r:id="rId17"/>
+    <p:sldId id="290" r:id="rId18"/>
+    <p:sldId id="291" r:id="rId19"/>
+    <p:sldId id="292" r:id="rId20"/>
   </p:sldIdLst>
   <p:sldSz cx="12192000" cy="6858000"/>
   <p:notesSz cx="6858000" cy="9144000"/>
@@ -212,7 +215,7 @@
           <a:p>
             <a:fld id="{E87D854A-D757-5C4C-A465-3201C554EB8D}" type="datetimeFigureOut">
               <a:rPr lang="en-US" smtClean="0"/>
-              <a:t>8/20/25</a:t>
+              <a:t>8/22/25</a:t>
             </a:fld>
             <a:endParaRPr lang="en-US"/>
           </a:p>
@@ -625,7 +628,7 @@
           <a:p>
             <a:fld id="{F1276487-8B75-2F43-9355-4B467BD57A6C}" type="datetime1">
               <a:rPr lang="en-US" smtClean="0"/>
-              <a:t>8/20/25</a:t>
+              <a:t>8/22/25</a:t>
             </a:fld>
             <a:endParaRPr lang="en-US"/>
           </a:p>
@@ -831,7 +834,7 @@
           <a:p>
             <a:fld id="{30B10427-957C-524C-8454-F629CBA9C9BE}" type="datetime1">
               <a:rPr lang="en-US" smtClean="0"/>
-              <a:t>8/20/25</a:t>
+              <a:t>8/22/25</a:t>
             </a:fld>
             <a:endParaRPr lang="en-US"/>
           </a:p>
@@ -1047,7 +1050,7 @@
           <a:p>
             <a:fld id="{4B97C5AB-4FB5-3149-A6CF-D0F885A81EBA}" type="datetime1">
               <a:rPr lang="en-US" smtClean="0"/>
-              <a:t>8/20/25</a:t>
+              <a:t>8/22/25</a:t>
             </a:fld>
             <a:endParaRPr lang="en-US"/>
           </a:p>
@@ -1253,7 +1256,7 @@
           <a:p>
             <a:fld id="{8D8F5D7A-DAAE-D246-A661-ED1AD3964955}" type="datetime1">
               <a:rPr lang="en-US" smtClean="0"/>
-              <a:t>8/20/25</a:t>
+              <a:t>8/22/25</a:t>
             </a:fld>
             <a:endParaRPr lang="en-US"/>
           </a:p>
@@ -1536,7 +1539,7 @@
           <a:p>
             <a:fld id="{801806B9-6C4B-3B45-9110-CA58C108BE01}" type="datetime1">
               <a:rPr lang="en-US" smtClean="0"/>
-              <a:t>8/20/25</a:t>
+              <a:t>8/22/25</a:t>
             </a:fld>
             <a:endParaRPr lang="en-US"/>
           </a:p>
@@ -1809,7 +1812,7 @@
           <a:p>
             <a:fld id="{025C6FEA-FDE7-B240-BEAF-6A3F6212E36E}" type="datetime1">
               <a:rPr lang="en-US" smtClean="0"/>
-              <a:t>8/20/25</a:t>
+              <a:t>8/22/25</a:t>
             </a:fld>
             <a:endParaRPr lang="en-US"/>
           </a:p>
@@ -2229,7 +2232,7 @@
           <a:p>
             <a:fld id="{895F5DD0-F679-3747-91F3-9DC9C3F86CB6}" type="datetime1">
               <a:rPr lang="en-US" smtClean="0"/>
-              <a:t>8/20/25</a:t>
+              <a:t>8/22/25</a:t>
             </a:fld>
             <a:endParaRPr lang="en-US"/>
           </a:p>
@@ -2378,7 +2381,7 @@
           <a:p>
             <a:fld id="{9EDA3FF8-7A34-ED49-AA5D-BC76DF58E74E}" type="datetime1">
               <a:rPr lang="en-US" smtClean="0"/>
-              <a:t>8/20/25</a:t>
+              <a:t>8/22/25</a:t>
             </a:fld>
             <a:endParaRPr lang="en-US"/>
           </a:p>
@@ -2499,7 +2502,7 @@
           <a:p>
             <a:fld id="{182A1C80-5B2D-564F-B8C6-B0B5B92F5809}" type="datetime1">
               <a:rPr lang="en-US" smtClean="0"/>
-              <a:t>8/20/25</a:t>
+              <a:t>8/22/25</a:t>
             </a:fld>
             <a:endParaRPr lang="en-US"/>
           </a:p>
@@ -2818,7 +2821,7 @@
           <a:p>
             <a:fld id="{65F75D97-7D6D-EC47-8250-30DF936063AD}" type="datetime1">
               <a:rPr lang="en-US" smtClean="0"/>
-              <a:t>8/20/25</a:t>
+              <a:t>8/22/25</a:t>
             </a:fld>
             <a:endParaRPr lang="en-US"/>
           </a:p>
@@ -3114,7 +3117,7 @@
           <a:p>
             <a:fld id="{D2E89D4A-5528-5F41-9AF6-6B3105C8A7C3}" type="datetime1">
               <a:rPr lang="en-US" smtClean="0"/>
-              <a:t>8/20/25</a:t>
+              <a:t>8/22/25</a:t>
             </a:fld>
             <a:endParaRPr lang="en-US"/>
           </a:p>
@@ -3355,7 +3358,7 @@
           <a:p>
             <a:fld id="{86344417-86B7-E841-9AA9-C4BE48872EF5}" type="datetime1">
               <a:rPr lang="en-US" smtClean="0"/>
-              <a:t>8/20/25</a:t>
+              <a:t>8/22/25</a:t>
             </a:fld>
             <a:endParaRPr lang="en-US"/>
           </a:p>
@@ -4165,6 +4168,151 @@
   <p:cSld>
     <p:spTree>
       <p:nvGrpSpPr>
+        <p:cNvPr id="1" name=""/>
+        <p:cNvGrpSpPr/>
+        <p:nvPr/>
+      </p:nvGrpSpPr>
+      <p:grpSpPr>
+        <a:xfrm>
+          <a:off x="0" y="0"/>
+          <a:ext cx="0" cy="0"/>
+          <a:chOff x="0" y="0"/>
+          <a:chExt cx="0" cy="0"/>
+        </a:xfrm>
+      </p:grpSpPr>
+      <p:sp>
+        <p:nvSpPr>
+          <p:cNvPr id="2" name="Title 1">
+            <a:extLst>
+              <a:ext uri="{FF2B5EF4-FFF2-40B4-BE49-F238E27FC236}">
+                <a16:creationId xmlns:a16="http://schemas.microsoft.com/office/drawing/2014/main" id="{C4BB9BEC-CD60-5242-B74C-0061DCF99C67}"/>
+              </a:ext>
+            </a:extLst>
+          </p:cNvPr>
+          <p:cNvSpPr>
+            <a:spLocks noGrp="1"/>
+          </p:cNvSpPr>
+          <p:nvPr>
+            <p:ph type="title"/>
+          </p:nvPr>
+        </p:nvSpPr>
+        <p:spPr/>
+        <p:txBody>
+          <a:bodyPr/>
+          <a:lstStyle/>
+          <a:p>
+            <a:r>
+              <a:rPr lang="en-US" dirty="0"/>
+              <a:t>Minimal viable product</a:t>
+            </a:r>
+          </a:p>
+        </p:txBody>
+      </p:sp>
+      <p:sp>
+        <p:nvSpPr>
+          <p:cNvPr id="3" name="Content Placeholder 2">
+            <a:extLst>
+              <a:ext uri="{FF2B5EF4-FFF2-40B4-BE49-F238E27FC236}">
+                <a16:creationId xmlns:a16="http://schemas.microsoft.com/office/drawing/2014/main" id="{CE5B939C-89E1-2014-B4FA-C1DB7F493719}"/>
+              </a:ext>
+            </a:extLst>
+          </p:cNvPr>
+          <p:cNvSpPr>
+            <a:spLocks noGrp="1"/>
+          </p:cNvSpPr>
+          <p:nvPr>
+            <p:ph idx="1"/>
+          </p:nvPr>
+        </p:nvSpPr>
+        <p:spPr/>
+        <p:txBody>
+          <a:bodyPr/>
+          <a:lstStyle/>
+          <a:p>
+            <a:r>
+              <a:rPr lang="en-US" dirty="0"/>
+              <a:t>Two players connect, moves sync in real time, win detection.</a:t>
+            </a:r>
+          </a:p>
+        </p:txBody>
+      </p:sp>
+      <p:sp>
+        <p:nvSpPr>
+          <p:cNvPr id="4" name="Slide Number Placeholder 3">
+            <a:extLst>
+              <a:ext uri="{FF2B5EF4-FFF2-40B4-BE49-F238E27FC236}">
+                <a16:creationId xmlns:a16="http://schemas.microsoft.com/office/drawing/2014/main" id="{EE8FD76E-05A3-B494-C42D-A993BFB665A5}"/>
+              </a:ext>
+            </a:extLst>
+          </p:cNvPr>
+          <p:cNvSpPr>
+            <a:spLocks noGrp="1"/>
+          </p:cNvSpPr>
+          <p:nvPr>
+            <p:ph type="sldNum" sz="quarter" idx="12"/>
+          </p:nvPr>
+        </p:nvSpPr>
+        <p:spPr/>
+        <p:txBody>
+          <a:bodyPr/>
+          <a:lstStyle/>
+          <a:p>
+            <a:fld id="{3AB30462-0FD5-604F-8C98-DCC91BE84583}" type="slidenum">
+              <a:rPr lang="en-US" smtClean="0"/>
+              <a:t>11</a:t>
+            </a:fld>
+            <a:endParaRPr lang="en-US"/>
+          </a:p>
+        </p:txBody>
+      </p:sp>
+      <p:pic>
+        <p:nvPicPr>
+          <p:cNvPr id="5" name="Picture 4">
+            <a:extLst>
+              <a:ext uri="{FF2B5EF4-FFF2-40B4-BE49-F238E27FC236}">
+                <a16:creationId xmlns:a16="http://schemas.microsoft.com/office/drawing/2014/main" id="{F6BD0585-3551-1E2C-C6DC-CDD048EF0DC8}"/>
+              </a:ext>
+            </a:extLst>
+          </p:cNvPr>
+          <p:cNvPicPr>
+            <a:picLocks noChangeAspect="1"/>
+          </p:cNvPicPr>
+          <p:nvPr/>
+        </p:nvPicPr>
+        <p:blipFill>
+          <a:blip r:embed="rId2"/>
+          <a:stretch>
+            <a:fillRect/>
+          </a:stretch>
+        </p:blipFill>
+        <p:spPr>
+          <a:xfrm>
+            <a:off x="4377242" y="2450900"/>
+            <a:ext cx="3437516" cy="3905450"/>
+          </a:xfrm>
+          <a:prstGeom prst="rect">
+            <a:avLst/>
+          </a:prstGeom>
+        </p:spPr>
+      </p:pic>
+    </p:spTree>
+    <p:extLst>
+      <p:ext uri="{BB962C8B-B14F-4D97-AF65-F5344CB8AC3E}">
+        <p14:creationId xmlns:p14="http://schemas.microsoft.com/office/powerpoint/2010/main" val="1865232189"/>
+      </p:ext>
+    </p:extLst>
+  </p:cSld>
+  <p:clrMapOvr>
+    <a:masterClrMapping/>
+  </p:clrMapOvr>
+</p:sld>
+</file>
+
+<file path=ppt/slides/slide12.xml><?xml version="1.0" encoding="utf-8"?>
+<p:sld xmlns:a="http://schemas.openxmlformats.org/drawingml/2006/main" xmlns:r="http://schemas.openxmlformats.org/officeDocument/2006/relationships" xmlns:p="http://schemas.openxmlformats.org/presentationml/2006/main">
+  <p:cSld>
+    <p:spTree>
+      <p:nvGrpSpPr>
         <p:cNvPr id="1" name="">
           <a:extLst>
             <a:ext uri="{FF2B5EF4-FFF2-40B4-BE49-F238E27FC236}">
@@ -4251,7 +4399,7 @@
           <a:p>
             <a:fld id="{3AB30462-0FD5-604F-8C98-DCC91BE84583}" type="slidenum">
               <a:rPr lang="en-US" smtClean="0"/>
-              <a:t>11</a:t>
+              <a:t>12</a:t>
             </a:fld>
             <a:endParaRPr lang="en-US"/>
           </a:p>
@@ -4300,118 +4448,6 @@
 </p:sld>
 </file>
 
-<file path=ppt/slides/slide12.xml><?xml version="1.0" encoding="utf-8"?>
-<p:sld xmlns:a="http://schemas.openxmlformats.org/drawingml/2006/main" xmlns:r="http://schemas.openxmlformats.org/officeDocument/2006/relationships" xmlns:p="http://schemas.openxmlformats.org/presentationml/2006/main">
-  <p:cSld>
-    <p:spTree>
-      <p:nvGrpSpPr>
-        <p:cNvPr id="1" name=""/>
-        <p:cNvGrpSpPr/>
-        <p:nvPr/>
-      </p:nvGrpSpPr>
-      <p:grpSpPr>
-        <a:xfrm>
-          <a:off x="0" y="0"/>
-          <a:ext cx="0" cy="0"/>
-          <a:chOff x="0" y="0"/>
-          <a:chExt cx="0" cy="0"/>
-        </a:xfrm>
-      </p:grpSpPr>
-      <p:sp>
-        <p:nvSpPr>
-          <p:cNvPr id="2" name="Title 1">
-            <a:extLst>
-              <a:ext uri="{FF2B5EF4-FFF2-40B4-BE49-F238E27FC236}">
-                <a16:creationId xmlns:a16="http://schemas.microsoft.com/office/drawing/2014/main" id="{BC1F0577-539D-089A-9C49-702B1C8FC055}"/>
-              </a:ext>
-            </a:extLst>
-          </p:cNvPr>
-          <p:cNvSpPr>
-            <a:spLocks noGrp="1"/>
-          </p:cNvSpPr>
-          <p:nvPr>
-            <p:ph type="title"/>
-          </p:nvPr>
-        </p:nvSpPr>
-        <p:spPr/>
-        <p:txBody>
-          <a:bodyPr/>
-          <a:lstStyle/>
-          <a:p>
-            <a:r>
-              <a:rPr lang="en-US" dirty="0"/>
-              <a:t>Control internal flow</a:t>
-            </a:r>
-          </a:p>
-        </p:txBody>
-      </p:sp>
-      <p:sp>
-        <p:nvSpPr>
-          <p:cNvPr id="3" name="Content Placeholder 2">
-            <a:extLst>
-              <a:ext uri="{FF2B5EF4-FFF2-40B4-BE49-F238E27FC236}">
-                <a16:creationId xmlns:a16="http://schemas.microsoft.com/office/drawing/2014/main" id="{AA3383E5-8774-4FE0-1624-32B79CD5BAD1}"/>
-              </a:ext>
-            </a:extLst>
-          </p:cNvPr>
-          <p:cNvSpPr>
-            <a:spLocks noGrp="1"/>
-          </p:cNvSpPr>
-          <p:nvPr>
-            <p:ph idx="1"/>
-          </p:nvPr>
-        </p:nvSpPr>
-        <p:spPr/>
-        <p:txBody>
-          <a:bodyPr/>
-          <a:lstStyle/>
-          <a:p>
-            <a:endParaRPr lang="en-US"/>
-          </a:p>
-        </p:txBody>
-      </p:sp>
-      <p:sp>
-        <p:nvSpPr>
-          <p:cNvPr id="4" name="Slide Number Placeholder 3">
-            <a:extLst>
-              <a:ext uri="{FF2B5EF4-FFF2-40B4-BE49-F238E27FC236}">
-                <a16:creationId xmlns:a16="http://schemas.microsoft.com/office/drawing/2014/main" id="{C014916F-F150-F82B-C93D-8DBF7DF33F30}"/>
-              </a:ext>
-            </a:extLst>
-          </p:cNvPr>
-          <p:cNvSpPr>
-            <a:spLocks noGrp="1"/>
-          </p:cNvSpPr>
-          <p:nvPr>
-            <p:ph type="sldNum" sz="quarter" idx="12"/>
-          </p:nvPr>
-        </p:nvSpPr>
-        <p:spPr/>
-        <p:txBody>
-          <a:bodyPr/>
-          <a:lstStyle/>
-          <a:p>
-            <a:fld id="{3AB30462-0FD5-604F-8C98-DCC91BE84583}" type="slidenum">
-              <a:rPr lang="en-US" smtClean="0"/>
-              <a:t>12</a:t>
-            </a:fld>
-            <a:endParaRPr lang="en-US"/>
-          </a:p>
-        </p:txBody>
-      </p:sp>
-    </p:spTree>
-    <p:extLst>
-      <p:ext uri="{BB962C8B-B14F-4D97-AF65-F5344CB8AC3E}">
-        <p14:creationId xmlns:p14="http://schemas.microsoft.com/office/powerpoint/2010/main" val="1168188669"/>
-      </p:ext>
-    </p:extLst>
-  </p:cSld>
-  <p:clrMapOvr>
-    <a:masterClrMapping/>
-  </p:clrMapOvr>
-</p:sld>
-</file>
-
 <file path=ppt/slides/slide13.xml><?xml version="1.0" encoding="utf-8"?>
 <p:sld xmlns:a="http://schemas.openxmlformats.org/drawingml/2006/main" xmlns:r="http://schemas.openxmlformats.org/officeDocument/2006/relationships" xmlns:p="http://schemas.openxmlformats.org/presentationml/2006/main">
   <p:cSld>
@@ -4431,10 +4467,91 @@
       </p:grpSpPr>
       <p:sp>
         <p:nvSpPr>
+          <p:cNvPr id="2" name="Title 1">
+            <a:extLst>
+              <a:ext uri="{FF2B5EF4-FFF2-40B4-BE49-F238E27FC236}">
+                <a16:creationId xmlns:a16="http://schemas.microsoft.com/office/drawing/2014/main" id="{65807C30-7E1E-7F7E-A77A-89A911999D9B}"/>
+              </a:ext>
+            </a:extLst>
+          </p:cNvPr>
+          <p:cNvSpPr>
+            <a:spLocks noGrp="1"/>
+          </p:cNvSpPr>
+          <p:nvPr>
+            <p:ph type="title"/>
+          </p:nvPr>
+        </p:nvSpPr>
+        <p:spPr/>
+        <p:txBody>
+          <a:bodyPr/>
+          <a:lstStyle/>
+          <a:p>
+            <a:r>
+              <a:rPr lang="en-US" dirty="0"/>
+              <a:t>What does view do?</a:t>
+            </a:r>
+          </a:p>
+        </p:txBody>
+      </p:sp>
+      <p:sp>
+        <p:nvSpPr>
+          <p:cNvPr id="3" name="Content Placeholder 2">
+            <a:extLst>
+              <a:ext uri="{FF2B5EF4-FFF2-40B4-BE49-F238E27FC236}">
+                <a16:creationId xmlns:a16="http://schemas.microsoft.com/office/drawing/2014/main" id="{707B3C43-2864-D1FC-C7B9-C513692C9259}"/>
+              </a:ext>
+            </a:extLst>
+          </p:cNvPr>
+          <p:cNvSpPr>
+            <a:spLocks noGrp="1"/>
+          </p:cNvSpPr>
+          <p:nvPr>
+            <p:ph idx="1"/>
+          </p:nvPr>
+        </p:nvSpPr>
+        <p:spPr/>
+        <p:txBody>
+          <a:bodyPr/>
+          <a:lstStyle/>
+          <a:p>
+            <a:r>
+              <a:rPr lang="en-US" dirty="0"/>
+              <a:t>Show three things on the screen</a:t>
+            </a:r>
+          </a:p>
+          <a:p>
+            <a:pPr lvl="1"/>
+            <a:r>
+              <a:rPr lang="en-US" dirty="0"/>
+              <a:t>A board</a:t>
+            </a:r>
+          </a:p>
+          <a:p>
+            <a:pPr lvl="1"/>
+            <a:r>
+              <a:rPr lang="en-US" dirty="0"/>
+              <a:t>Whose turn it is, and what stone you play</a:t>
+            </a:r>
+          </a:p>
+          <a:p>
+            <a:pPr lvl="1"/>
+            <a:r>
+              <a:rPr lang="en-US" dirty="0"/>
+              <a:t>If one of the players has won</a:t>
+            </a:r>
+          </a:p>
+          <a:p>
+            <a:pPr lvl="1"/>
+            <a:endParaRPr lang="en-US" dirty="0"/>
+          </a:p>
+        </p:txBody>
+      </p:sp>
+      <p:sp>
+        <p:nvSpPr>
           <p:cNvPr id="4" name="Slide Number Placeholder 3">
             <a:extLst>
               <a:ext uri="{FF2B5EF4-FFF2-40B4-BE49-F238E27FC236}">
-                <a16:creationId xmlns:a16="http://schemas.microsoft.com/office/drawing/2014/main" id="{EA9A51AD-DAB4-490B-61FD-4BAD314648C2}"/>
+                <a16:creationId xmlns:a16="http://schemas.microsoft.com/office/drawing/2014/main" id="{7FF770EC-6E12-7D5F-F35F-8601AC056C52}"/>
               </a:ext>
             </a:extLst>
           </p:cNvPr>
@@ -4453,6 +4570,292 @@
             <a:fld id="{3AB30462-0FD5-604F-8C98-DCC91BE84583}" type="slidenum">
               <a:rPr lang="en-US" smtClean="0"/>
               <a:t>13</a:t>
+            </a:fld>
+            <a:endParaRPr lang="en-US"/>
+          </a:p>
+        </p:txBody>
+      </p:sp>
+    </p:spTree>
+    <p:extLst>
+      <p:ext uri="{BB962C8B-B14F-4D97-AF65-F5344CB8AC3E}">
+        <p14:creationId xmlns:p14="http://schemas.microsoft.com/office/powerpoint/2010/main" val="3171483209"/>
+      </p:ext>
+    </p:extLst>
+  </p:cSld>
+  <p:clrMapOvr>
+    <a:masterClrMapping/>
+  </p:clrMapOvr>
+</p:sld>
+</file>
+
+<file path=ppt/slides/slide14.xml><?xml version="1.0" encoding="utf-8"?>
+<p:sld xmlns:a="http://schemas.openxmlformats.org/drawingml/2006/main" xmlns:r="http://schemas.openxmlformats.org/officeDocument/2006/relationships" xmlns:p="http://schemas.openxmlformats.org/presentationml/2006/main">
+  <p:cSld>
+    <p:spTree>
+      <p:nvGrpSpPr>
+        <p:cNvPr id="1" name=""/>
+        <p:cNvGrpSpPr/>
+        <p:nvPr/>
+      </p:nvGrpSpPr>
+      <p:grpSpPr>
+        <a:xfrm>
+          <a:off x="0" y="0"/>
+          <a:ext cx="0" cy="0"/>
+          <a:chOff x="0" y="0"/>
+          <a:chExt cx="0" cy="0"/>
+        </a:xfrm>
+      </p:grpSpPr>
+      <p:sp>
+        <p:nvSpPr>
+          <p:cNvPr id="2" name="Title 1">
+            <a:extLst>
+              <a:ext uri="{FF2B5EF4-FFF2-40B4-BE49-F238E27FC236}">
+                <a16:creationId xmlns:a16="http://schemas.microsoft.com/office/drawing/2014/main" id="{D6E7EE5A-CBAB-A4F5-A538-E43CA250060C}"/>
+              </a:ext>
+            </a:extLst>
+          </p:cNvPr>
+          <p:cNvSpPr>
+            <a:spLocks noGrp="1"/>
+          </p:cNvSpPr>
+          <p:nvPr>
+            <p:ph type="title"/>
+          </p:nvPr>
+        </p:nvSpPr>
+        <p:spPr/>
+        <p:txBody>
+          <a:bodyPr/>
+          <a:lstStyle/>
+          <a:p>
+            <a:r>
+              <a:rPr lang="en-US" dirty="0"/>
+              <a:t>What property should the game state have?</a:t>
+            </a:r>
+          </a:p>
+        </p:txBody>
+      </p:sp>
+      <p:sp>
+        <p:nvSpPr>
+          <p:cNvPr id="3" name="Content Placeholder 2">
+            <a:extLst>
+              <a:ext uri="{FF2B5EF4-FFF2-40B4-BE49-F238E27FC236}">
+                <a16:creationId xmlns:a16="http://schemas.microsoft.com/office/drawing/2014/main" id="{FE6F77C6-CFC2-ADFB-FF6D-99DF4C21A0D2}"/>
+              </a:ext>
+            </a:extLst>
+          </p:cNvPr>
+          <p:cNvSpPr>
+            <a:spLocks noGrp="1"/>
+          </p:cNvSpPr>
+          <p:nvPr>
+            <p:ph idx="1"/>
+          </p:nvPr>
+        </p:nvSpPr>
+        <p:spPr/>
+        <p:txBody>
+          <a:bodyPr/>
+          <a:lstStyle/>
+          <a:p>
+            <a:r>
+              <a:rPr lang="en-US"/>
+              <a:t>GameState</a:t>
+            </a:r>
+          </a:p>
+        </p:txBody>
+      </p:sp>
+      <p:sp>
+        <p:nvSpPr>
+          <p:cNvPr id="4" name="Slide Number Placeholder 3">
+            <a:extLst>
+              <a:ext uri="{FF2B5EF4-FFF2-40B4-BE49-F238E27FC236}">
+                <a16:creationId xmlns:a16="http://schemas.microsoft.com/office/drawing/2014/main" id="{96CC5E93-F29A-E9A5-FFA3-3CA2E664605B}"/>
+              </a:ext>
+            </a:extLst>
+          </p:cNvPr>
+          <p:cNvSpPr>
+            <a:spLocks noGrp="1"/>
+          </p:cNvSpPr>
+          <p:nvPr>
+            <p:ph type="sldNum" sz="quarter" idx="12"/>
+          </p:nvPr>
+        </p:nvSpPr>
+        <p:spPr/>
+        <p:txBody>
+          <a:bodyPr/>
+          <a:lstStyle/>
+          <a:p>
+            <a:fld id="{3AB30462-0FD5-604F-8C98-DCC91BE84583}" type="slidenum">
+              <a:rPr lang="en-US" smtClean="0"/>
+              <a:t>14</a:t>
+            </a:fld>
+            <a:endParaRPr lang="en-US"/>
+          </a:p>
+        </p:txBody>
+      </p:sp>
+    </p:spTree>
+    <p:extLst>
+      <p:ext uri="{BB962C8B-B14F-4D97-AF65-F5344CB8AC3E}">
+        <p14:creationId xmlns:p14="http://schemas.microsoft.com/office/powerpoint/2010/main" val="2704085234"/>
+      </p:ext>
+    </p:extLst>
+  </p:cSld>
+  <p:clrMapOvr>
+    <a:masterClrMapping/>
+  </p:clrMapOvr>
+</p:sld>
+</file>
+
+<file path=ppt/slides/slide15.xml><?xml version="1.0" encoding="utf-8"?>
+<p:sld xmlns:a="http://schemas.openxmlformats.org/drawingml/2006/main" xmlns:r="http://schemas.openxmlformats.org/officeDocument/2006/relationships" xmlns:p="http://schemas.openxmlformats.org/presentationml/2006/main">
+  <p:cSld>
+    <p:spTree>
+      <p:nvGrpSpPr>
+        <p:cNvPr id="1" name=""/>
+        <p:cNvGrpSpPr/>
+        <p:nvPr/>
+      </p:nvGrpSpPr>
+      <p:grpSpPr>
+        <a:xfrm>
+          <a:off x="0" y="0"/>
+          <a:ext cx="0" cy="0"/>
+          <a:chOff x="0" y="0"/>
+          <a:chExt cx="0" cy="0"/>
+        </a:xfrm>
+      </p:grpSpPr>
+      <p:sp>
+        <p:nvSpPr>
+          <p:cNvPr id="2" name="Title 1">
+            <a:extLst>
+              <a:ext uri="{FF2B5EF4-FFF2-40B4-BE49-F238E27FC236}">
+                <a16:creationId xmlns:a16="http://schemas.microsoft.com/office/drawing/2014/main" id="{BC1F0577-539D-089A-9C49-702B1C8FC055}"/>
+              </a:ext>
+            </a:extLst>
+          </p:cNvPr>
+          <p:cNvSpPr>
+            <a:spLocks noGrp="1"/>
+          </p:cNvSpPr>
+          <p:nvPr>
+            <p:ph type="title"/>
+          </p:nvPr>
+        </p:nvSpPr>
+        <p:spPr/>
+        <p:txBody>
+          <a:bodyPr/>
+          <a:lstStyle/>
+          <a:p>
+            <a:r>
+              <a:rPr lang="en-US" dirty="0"/>
+              <a:t>Control internal flow</a:t>
+            </a:r>
+          </a:p>
+        </p:txBody>
+      </p:sp>
+      <p:sp>
+        <p:nvSpPr>
+          <p:cNvPr id="3" name="Content Placeholder 2">
+            <a:extLst>
+              <a:ext uri="{FF2B5EF4-FFF2-40B4-BE49-F238E27FC236}">
+                <a16:creationId xmlns:a16="http://schemas.microsoft.com/office/drawing/2014/main" id="{AA3383E5-8774-4FE0-1624-32B79CD5BAD1}"/>
+              </a:ext>
+            </a:extLst>
+          </p:cNvPr>
+          <p:cNvSpPr>
+            <a:spLocks noGrp="1"/>
+          </p:cNvSpPr>
+          <p:nvPr>
+            <p:ph idx="1"/>
+          </p:nvPr>
+        </p:nvSpPr>
+        <p:spPr/>
+        <p:txBody>
+          <a:bodyPr/>
+          <a:lstStyle/>
+          <a:p>
+            <a:endParaRPr lang="en-US"/>
+          </a:p>
+        </p:txBody>
+      </p:sp>
+      <p:sp>
+        <p:nvSpPr>
+          <p:cNvPr id="4" name="Slide Number Placeholder 3">
+            <a:extLst>
+              <a:ext uri="{FF2B5EF4-FFF2-40B4-BE49-F238E27FC236}">
+                <a16:creationId xmlns:a16="http://schemas.microsoft.com/office/drawing/2014/main" id="{C014916F-F150-F82B-C93D-8DBF7DF33F30}"/>
+              </a:ext>
+            </a:extLst>
+          </p:cNvPr>
+          <p:cNvSpPr>
+            <a:spLocks noGrp="1"/>
+          </p:cNvSpPr>
+          <p:nvPr>
+            <p:ph type="sldNum" sz="quarter" idx="12"/>
+          </p:nvPr>
+        </p:nvSpPr>
+        <p:spPr/>
+        <p:txBody>
+          <a:bodyPr/>
+          <a:lstStyle/>
+          <a:p>
+            <a:fld id="{3AB30462-0FD5-604F-8C98-DCC91BE84583}" type="slidenum">
+              <a:rPr lang="en-US" smtClean="0"/>
+              <a:t>15</a:t>
+            </a:fld>
+            <a:endParaRPr lang="en-US"/>
+          </a:p>
+        </p:txBody>
+      </p:sp>
+    </p:spTree>
+    <p:extLst>
+      <p:ext uri="{BB962C8B-B14F-4D97-AF65-F5344CB8AC3E}">
+        <p14:creationId xmlns:p14="http://schemas.microsoft.com/office/powerpoint/2010/main" val="1168188669"/>
+      </p:ext>
+    </p:extLst>
+  </p:cSld>
+  <p:clrMapOvr>
+    <a:masterClrMapping/>
+  </p:clrMapOvr>
+</p:sld>
+</file>
+
+<file path=ppt/slides/slide16.xml><?xml version="1.0" encoding="utf-8"?>
+<p:sld xmlns:a="http://schemas.openxmlformats.org/drawingml/2006/main" xmlns:r="http://schemas.openxmlformats.org/officeDocument/2006/relationships" xmlns:p="http://schemas.openxmlformats.org/presentationml/2006/main">
+  <p:cSld>
+    <p:spTree>
+      <p:nvGrpSpPr>
+        <p:cNvPr id="1" name=""/>
+        <p:cNvGrpSpPr/>
+        <p:nvPr/>
+      </p:nvGrpSpPr>
+      <p:grpSpPr>
+        <a:xfrm>
+          <a:off x="0" y="0"/>
+          <a:ext cx="0" cy="0"/>
+          <a:chOff x="0" y="0"/>
+          <a:chExt cx="0" cy="0"/>
+        </a:xfrm>
+      </p:grpSpPr>
+      <p:sp>
+        <p:nvSpPr>
+          <p:cNvPr id="4" name="Slide Number Placeholder 3">
+            <a:extLst>
+              <a:ext uri="{FF2B5EF4-FFF2-40B4-BE49-F238E27FC236}">
+                <a16:creationId xmlns:a16="http://schemas.microsoft.com/office/drawing/2014/main" id="{EA9A51AD-DAB4-490B-61FD-4BAD314648C2}"/>
+              </a:ext>
+            </a:extLst>
+          </p:cNvPr>
+          <p:cNvSpPr>
+            <a:spLocks noGrp="1"/>
+          </p:cNvSpPr>
+          <p:nvPr>
+            <p:ph type="sldNum" sz="quarter" idx="12"/>
+          </p:nvPr>
+        </p:nvSpPr>
+        <p:spPr/>
+        <p:txBody>
+          <a:bodyPr/>
+          <a:lstStyle/>
+          <a:p>
+            <a:fld id="{3AB30462-0FD5-604F-8C98-DCC91BE84583}" type="slidenum">
+              <a:rPr lang="en-US" smtClean="0"/>
+              <a:t>16</a:t>
             </a:fld>
             <a:endParaRPr lang="en-US"/>
           </a:p>
@@ -4501,7 +4904,7 @@
 </p:sld>
 </file>
 
-<file path=ppt/slides/slide14.xml><?xml version="1.0" encoding="utf-8"?>
+<file path=ppt/slides/slide17.xml><?xml version="1.0" encoding="utf-8"?>
 <p:sld xmlns:a="http://schemas.openxmlformats.org/drawingml/2006/main" xmlns:r="http://schemas.openxmlformats.org/officeDocument/2006/relationships" xmlns:p="http://schemas.openxmlformats.org/presentationml/2006/main">
   <p:cSld>
     <p:spTree>
@@ -4630,7 +5033,7 @@
           <a:p>
             <a:fld id="{3AB30462-0FD5-604F-8C98-DCC91BE84583}" type="slidenum">
               <a:rPr lang="en-US" smtClean="0"/>
-              <a:t>14</a:t>
+              <a:t>17</a:t>
             </a:fld>
             <a:endParaRPr lang="en-US"/>
           </a:p>
@@ -4649,7 +5052,7 @@
 </p:sld>
 </file>
 
-<file path=ppt/slides/slide15.xml><?xml version="1.0" encoding="utf-8"?>
+<file path=ppt/slides/slide18.xml><?xml version="1.0" encoding="utf-8"?>
 <p:sld xmlns:a="http://schemas.openxmlformats.org/drawingml/2006/main" xmlns:r="http://schemas.openxmlformats.org/officeDocument/2006/relationships" xmlns:p="http://schemas.openxmlformats.org/presentationml/2006/main">
   <p:cSld>
     <p:spTree>
@@ -4742,7 +5145,7 @@
           <a:p>
             <a:fld id="{3AB30462-0FD5-604F-8C98-DCC91BE84583}" type="slidenum">
               <a:rPr lang="en-US" smtClean="0"/>
-              <a:t>15</a:t>
+              <a:t>18</a:t>
             </a:fld>
             <a:endParaRPr lang="en-US"/>
           </a:p>
@@ -4761,7 +5164,7 @@
 </p:sld>
 </file>
 
-<file path=ppt/slides/slide16.xml><?xml version="1.0" encoding="utf-8"?>
+<file path=ppt/slides/slide19.xml><?xml version="1.0" encoding="utf-8"?>
 <p:sld xmlns:a="http://schemas.openxmlformats.org/drawingml/2006/main" xmlns:r="http://schemas.openxmlformats.org/officeDocument/2006/relationships" xmlns:p="http://schemas.openxmlformats.org/presentationml/2006/main">
   <p:cSld>
     <p:spTree>
@@ -4900,7 +5303,7 @@
           <a:p>
             <a:fld id="{3AB30462-0FD5-604F-8C98-DCC91BE84583}" type="slidenum">
               <a:rPr lang="en-US" smtClean="0"/>
-              <a:t>16</a:t>
+              <a:t>19</a:t>
             </a:fld>
             <a:endParaRPr lang="en-US"/>
           </a:p>
